--- a/presentations/OPC UA Device Support.pptx
+++ b/presentations/OPC UA Device Support.pptx
@@ -5,7 +5,7 @@
     <p:sldMasterId id="2147483648" r:id="rId1"/>
   </p:sldMasterIdLst>
   <p:notesMasterIdLst>
-    <p:notesMasterId r:id="rId26"/>
+    <p:notesMasterId r:id="rId27"/>
   </p:notesMasterIdLst>
   <p:sldIdLst>
     <p:sldId id="256" r:id="rId2"/>
@@ -18,20 +18,21 @@
     <p:sldId id="269" r:id="rId9"/>
     <p:sldId id="270" r:id="rId10"/>
     <p:sldId id="262" r:id="rId11"/>
-    <p:sldId id="277" r:id="rId12"/>
+    <p:sldId id="282" r:id="rId12"/>
     <p:sldId id="263" r:id="rId13"/>
-    <p:sldId id="264" r:id="rId14"/>
-    <p:sldId id="274" r:id="rId15"/>
-    <p:sldId id="271" r:id="rId16"/>
-    <p:sldId id="272" r:id="rId17"/>
-    <p:sldId id="275" r:id="rId18"/>
-    <p:sldId id="276" r:id="rId19"/>
-    <p:sldId id="265" r:id="rId20"/>
-    <p:sldId id="266" r:id="rId21"/>
-    <p:sldId id="267" r:id="rId22"/>
-    <p:sldId id="280" r:id="rId23"/>
-    <p:sldId id="278" r:id="rId24"/>
-    <p:sldId id="279" r:id="rId25"/>
+    <p:sldId id="283" r:id="rId14"/>
+    <p:sldId id="284" r:id="rId15"/>
+    <p:sldId id="274" r:id="rId16"/>
+    <p:sldId id="285" r:id="rId17"/>
+    <p:sldId id="272" r:id="rId18"/>
+    <p:sldId id="275" r:id="rId19"/>
+    <p:sldId id="276" r:id="rId20"/>
+    <p:sldId id="265" r:id="rId21"/>
+    <p:sldId id="266" r:id="rId22"/>
+    <p:sldId id="267" r:id="rId23"/>
+    <p:sldId id="280" r:id="rId24"/>
+    <p:sldId id="278" r:id="rId25"/>
+    <p:sldId id="279" r:id="rId26"/>
   </p:sldIdLst>
   <p:sldSz cx="12192000" cy="6858000"/>
   <p:notesSz cx="6858000" cy="9144000"/>
@@ -220,7 +221,7 @@
           <a:p>
             <a:fld id="{716869FB-2945-4F10-8904-29087F4CE19E}" type="datetimeFigureOut">
               <a:rPr lang="en-US" smtClean="0"/>
-              <a:t>9/13/2024</a:t>
+              <a:t>4/11/2025</a:t>
             </a:fld>
             <a:endParaRPr lang="en-US"/>
           </a:p>
@@ -673,7 +674,7 @@
           <a:p>
             <a:fld id="{47C5AB9A-F81E-4440-BDED-9BA4C420D690}" type="datetime1">
               <a:rPr lang="en-US" smtClean="0"/>
-              <a:t>9/13/2024</a:t>
+              <a:t>4/11/2025</a:t>
             </a:fld>
             <a:endParaRPr lang="en-US" dirty="0"/>
           </a:p>
@@ -943,7 +944,7 @@
           <a:p>
             <a:fld id="{C4DB84B4-982F-4BFE-B0C4-CFE3DA9F4219}" type="datetime1">
               <a:rPr lang="en-US" smtClean="0"/>
-              <a:t>9/13/2024</a:t>
+              <a:t>4/11/2025</a:t>
             </a:fld>
             <a:endParaRPr lang="en-US" dirty="0"/>
           </a:p>
@@ -1132,7 +1133,7 @@
           <a:p>
             <a:fld id="{F53A0519-9A7C-442D-9F11-88D0D81E1D8E}" type="datetime1">
               <a:rPr lang="en-US" smtClean="0"/>
-              <a:t>9/13/2024</a:t>
+              <a:t>4/11/2025</a:t>
             </a:fld>
             <a:endParaRPr lang="en-US" dirty="0"/>
           </a:p>
@@ -1400,7 +1401,7 @@
           <a:p>
             <a:fld id="{F6F145AF-1098-467F-9087-477835A0A22A}" type="datetime1">
               <a:rPr lang="en-US" smtClean="0"/>
-              <a:t>9/13/2024</a:t>
+              <a:t>4/11/2025</a:t>
             </a:fld>
             <a:endParaRPr lang="en-US" dirty="0"/>
           </a:p>
@@ -1736,7 +1737,7 @@
           <a:p>
             <a:fld id="{3C9526AC-4BE9-4839-8FA1-C95270D80ACC}" type="datetime1">
               <a:rPr lang="en-US" smtClean="0"/>
-              <a:t>9/13/2024</a:t>
+              <a:t>4/11/2025</a:t>
             </a:fld>
             <a:endParaRPr lang="en-US" dirty="0"/>
           </a:p>
@@ -2354,7 +2355,7 @@
           <a:p>
             <a:fld id="{E2F4266C-CD0C-404C-834F-91A150383C31}" type="datetime1">
               <a:rPr lang="en-US" smtClean="0"/>
-              <a:t>9/13/2024</a:t>
+              <a:t>4/11/2025</a:t>
             </a:fld>
             <a:endParaRPr lang="en-US" dirty="0"/>
           </a:p>
@@ -3209,7 +3210,7 @@
           <a:p>
             <a:fld id="{E7C324AD-85E8-41AC-B891-3AE7AE50CCA1}" type="datetime1">
               <a:rPr lang="en-US" smtClean="0"/>
-              <a:t>9/13/2024</a:t>
+              <a:t>4/11/2025</a:t>
             </a:fld>
             <a:endParaRPr lang="en-US" dirty="0"/>
           </a:p>
@@ -3374,7 +3375,7 @@
           <a:p>
             <a:fld id="{659ECC34-14C6-48CB-A350-02E5DD550617}" type="datetime1">
               <a:rPr lang="en-US" smtClean="0"/>
-              <a:t>9/13/2024</a:t>
+              <a:t>4/11/2025</a:t>
             </a:fld>
             <a:endParaRPr lang="en-US" dirty="0"/>
           </a:p>
@@ -3549,7 +3550,7 @@
           <a:p>
             <a:fld id="{CDEE3CAD-2D1D-46E0-9BD6-F824C94E7E06}" type="datetime1">
               <a:rPr lang="en-US" smtClean="0"/>
-              <a:t>9/13/2024</a:t>
+              <a:t>4/11/2025</a:t>
             </a:fld>
             <a:endParaRPr lang="en-US" dirty="0"/>
           </a:p>
@@ -3744,7 +3745,7 @@
           <a:p>
             <a:fld id="{62A27B99-B71A-4FFD-A202-FFEC51F36A60}" type="datetime1">
               <a:rPr lang="en-US" smtClean="0"/>
-              <a:t>9/13/2024</a:t>
+              <a:t>4/11/2025</a:t>
             </a:fld>
             <a:endParaRPr lang="en-US" dirty="0"/>
           </a:p>
@@ -3986,7 +3987,7 @@
           <a:p>
             <a:fld id="{D8496B04-F03C-496C-8BA2-CFE422FCA2D5}" type="datetime1">
               <a:rPr lang="en-US" smtClean="0"/>
-              <a:t>9/13/2024</a:t>
+              <a:t>4/11/2025</a:t>
             </a:fld>
             <a:endParaRPr lang="en-US" dirty="0"/>
           </a:p>
@@ -4301,7 +4302,7 @@
           <a:p>
             <a:fld id="{F8993AB8-E15D-4E49-8BF1-48EF9F4FF5DA}" type="datetime1">
               <a:rPr lang="en-US" smtClean="0"/>
-              <a:t>9/13/2024</a:t>
+              <a:t>4/11/2025</a:t>
             </a:fld>
             <a:endParaRPr lang="en-US" dirty="0"/>
           </a:p>
@@ -4740,7 +4741,7 @@
           <a:p>
             <a:fld id="{C5AADFC3-4799-4ADF-B29D-80CB1C0A5516}" type="datetime1">
               <a:rPr lang="en-US" smtClean="0"/>
-              <a:t>9/13/2024</a:t>
+              <a:t>4/11/2025</a:t>
             </a:fld>
             <a:endParaRPr lang="en-US" dirty="0"/>
           </a:p>
@@ -4853,7 +4854,7 @@
           <a:p>
             <a:fld id="{D84CE6CB-3FD5-4F5B-93CB-CE17FE34C423}" type="datetime1">
               <a:rPr lang="en-US" smtClean="0"/>
-              <a:t>9/13/2024</a:t>
+              <a:t>4/11/2025</a:t>
             </a:fld>
             <a:endParaRPr lang="en-US" dirty="0"/>
           </a:p>
@@ -4943,7 +4944,7 @@
           <a:p>
             <a:fld id="{B2CB2BC3-4582-43E9-A259-AAE1AA3F94D5}" type="datetime1">
               <a:rPr lang="en-US" smtClean="0"/>
-              <a:t>9/13/2024</a:t>
+              <a:t>4/11/2025</a:t>
             </a:fld>
             <a:endParaRPr lang="en-US" dirty="0"/>
           </a:p>
@@ -5217,7 +5218,7 @@
           <a:p>
             <a:fld id="{0AE86A0D-78F0-4F86-A69A-FCDE376979B3}" type="datetime1">
               <a:rPr lang="en-US" smtClean="0"/>
-              <a:t>9/13/2024</a:t>
+              <a:t>4/11/2025</a:t>
             </a:fld>
             <a:endParaRPr lang="en-US" dirty="0"/>
           </a:p>
@@ -5487,7 +5488,7 @@
           <a:p>
             <a:fld id="{8AA90D7B-3DAD-4D19-AE7F-6EB3EF74D3BB}" type="datetime1">
               <a:rPr lang="en-US" smtClean="0"/>
-              <a:t>9/13/2024</a:t>
+              <a:t>4/11/2025</a:t>
             </a:fld>
             <a:endParaRPr lang="en-US" dirty="0"/>
           </a:p>
@@ -5909,7 +5910,7 @@
           <a:p>
             <a:fld id="{E7239603-A030-4CC3-9DA2-96785DC6FE3A}" type="datetime1">
               <a:rPr lang="en-US" smtClean="0"/>
-              <a:t>9/13/2024</a:t>
+              <a:t>4/11/2025</a:t>
             </a:fld>
             <a:endParaRPr lang="en-US" dirty="0"/>
           </a:p>
@@ -6680,14 +6681,20 @@
       </p:pic>
       <p:pic>
         <p:nvPicPr>
-          <p:cNvPr id="3076" name="Picture 4" descr="https://upload.wikimedia.org/wikipedia/commons/thumb/b/b2/Paul_Scherrer_Institut.svg/640px-Paul_Scherrer_Institut.svg.png"/>
+          <p:cNvPr id="4" name="Grafik 1">
+            <a:extLst>
+              <a:ext uri="{FF2B5EF4-FFF2-40B4-BE49-F238E27FC236}">
+                <a16:creationId xmlns:a16="http://schemas.microsoft.com/office/drawing/2014/main" id="{41F044A5-D906-F026-9CE5-F72E676731E0}"/>
+              </a:ext>
+            </a:extLst>
+          </p:cNvPr>
           <p:cNvPicPr>
-            <a:picLocks noChangeAspect="1" noChangeArrowheads="1"/>
+            <a:picLocks noChangeAspect="1"/>
           </p:cNvPicPr>
           <p:nvPr/>
         </p:nvPicPr>
         <p:blipFill>
-          <a:blip r:embed="rId6">
+          <a:blip r:embed="rId6" cstate="print">
             <a:extLst>
               <a:ext uri="{28A0092B-C50C-407E-A947-70E740481C1C}">
                 <a14:useLocalDpi xmlns:a14="http://schemas.microsoft.com/office/drawing/2010/main" val="0"/>
@@ -6695,28 +6702,16 @@
             </a:extLst>
           </a:blip>
           <a:srcRect/>
-          <a:stretch>
-            <a:fillRect/>
-          </a:stretch>
+          <a:stretch/>
         </p:blipFill>
-        <p:spPr bwMode="auto">
+        <p:spPr>
           <a:xfrm>
-            <a:off x="4246125" y="862825"/>
-            <a:ext cx="1634864" cy="584975"/>
+            <a:off x="4390501" y="869285"/>
+            <a:ext cx="1346153" cy="554051"/>
           </a:xfrm>
           <a:prstGeom prst="rect">
             <a:avLst/>
           </a:prstGeom>
-          <a:noFill/>
-          <a:extLst>
-            <a:ext uri="{909E8E84-426E-40DD-AFC4-6F175D3DCCD1}">
-              <a14:hiddenFill xmlns:a14="http://schemas.microsoft.com/office/drawing/2010/main">
-                <a:solidFill>
-                  <a:srgbClr val="FFFFFF"/>
-                </a:solidFill>
-              </a14:hiddenFill>
-            </a:ext>
-          </a:extLst>
         </p:spPr>
       </p:pic>
     </p:spTree>
@@ -6911,7 +6906,13 @@
   <p:cSld>
     <p:spTree>
       <p:nvGrpSpPr>
-        <p:cNvPr id="1" name=""/>
+        <p:cNvPr id="1" name="">
+          <a:extLst>
+            <a:ext uri="{FF2B5EF4-FFF2-40B4-BE49-F238E27FC236}">
+              <a16:creationId xmlns:a16="http://schemas.microsoft.com/office/drawing/2014/main" id="{6830599A-9AB0-090B-C80B-56D043E70D08}"/>
+            </a:ext>
+          </a:extLst>
+        </p:cNvPr>
         <p:cNvGrpSpPr/>
         <p:nvPr/>
       </p:nvGrpSpPr>
@@ -6925,7 +6926,13 @@
       </p:grpSpPr>
       <p:sp>
         <p:nvSpPr>
-          <p:cNvPr id="2" name="Title 1"/>
+          <p:cNvPr id="2" name="Title 1">
+            <a:extLst>
+              <a:ext uri="{FF2B5EF4-FFF2-40B4-BE49-F238E27FC236}">
+                <a16:creationId xmlns:a16="http://schemas.microsoft.com/office/drawing/2014/main" id="{6AA224B0-EC16-D47F-F0C7-4D6F3BF0F6D7}"/>
+              </a:ext>
+            </a:extLst>
+          </p:cNvPr>
           <p:cNvSpPr>
             <a:spLocks noGrp="1"/>
           </p:cNvSpPr>
@@ -6947,14 +6954,20 @@
             </a:br>
             <a:r>
               <a:rPr lang="en-US" sz="2800" i="1" dirty="0"/>
-              <a:t>Low-Level OPC UA Client Choices</a:t>
-            </a:r>
-          </a:p>
-        </p:txBody>
-      </p:sp>
-      <p:sp>
-        <p:nvSpPr>
-          <p:cNvPr id="3" name="Content Placeholder 2"/>
+              <a:t>Two Low-Level OPC UA Client Choices</a:t>
+            </a:r>
+          </a:p>
+        </p:txBody>
+      </p:sp>
+      <p:sp>
+        <p:nvSpPr>
+          <p:cNvPr id="3" name="Content Placeholder 2">
+            <a:extLst>
+              <a:ext uri="{FF2B5EF4-FFF2-40B4-BE49-F238E27FC236}">
+                <a16:creationId xmlns:a16="http://schemas.microsoft.com/office/drawing/2014/main" id="{FAFFE0E0-0B82-3794-9B3F-B9C6084A9A0B}"/>
+              </a:ext>
+            </a:extLst>
+          </p:cNvPr>
           <p:cNvSpPr>
             <a:spLocks noGrp="1"/>
           </p:cNvSpPr>
@@ -6962,7 +6975,12 @@
             <p:ph idx="1"/>
           </p:nvPr>
         </p:nvSpPr>
-        <p:spPr/>
+        <p:spPr>
+          <a:xfrm>
+            <a:off x="1103312" y="1872000"/>
+            <a:ext cx="8946541" cy="4606954"/>
+          </a:xfrm>
+        </p:spPr>
         <p:txBody>
           <a:bodyPr>
             <a:noAutofit/>
@@ -6971,7 +6989,7 @@
           <a:p>
             <a:r>
               <a:rPr lang="en-US" dirty="0"/>
-              <a:t>Stable: Use of commercial C++ Client SDK by Unified Automation</a:t>
+              <a:t>Commercial C++ Client SDK by Unified Automation</a:t>
             </a:r>
             <a:endParaRPr lang="en-GB" dirty="0"/>
           </a:p>
@@ -7023,7 +7041,7 @@
           <a:p>
             <a:r>
               <a:rPr lang="en-US" dirty="0"/>
-              <a:t>New: Use of free open62541 SDK client libraries</a:t>
+              <a:t>New (2024): Free open62541 SDK C client libraries</a:t>
             </a:r>
           </a:p>
           <a:p>
@@ -7062,6 +7080,13 @@
             <a:pPr lvl="1"/>
             <a:r>
               <a:rPr lang="en-US" dirty="0"/>
+              <a:t>Platforms: Windows and Linux</a:t>
+            </a:r>
+          </a:p>
+          <a:p>
+            <a:pPr lvl="1"/>
+            <a:r>
+              <a:rPr lang="en-US" dirty="0"/>
               <a:t>Less documentation than the Unified Automation SDK</a:t>
             </a:r>
           </a:p>
@@ -7072,7 +7097,13 @@
       </p:sp>
       <p:sp>
         <p:nvSpPr>
-          <p:cNvPr id="4" name="Slide Number Placeholder 3"/>
+          <p:cNvPr id="4" name="Slide Number Placeholder 3">
+            <a:extLst>
+              <a:ext uri="{FF2B5EF4-FFF2-40B4-BE49-F238E27FC236}">
+                <a16:creationId xmlns:a16="http://schemas.microsoft.com/office/drawing/2014/main" id="{2E27DC98-941A-B39D-EAE4-8045B07A1901}"/>
+              </a:ext>
+            </a:extLst>
+          </p:cNvPr>
           <p:cNvSpPr>
             <a:spLocks noGrp="1"/>
           </p:cNvSpPr>
@@ -7096,7 +7127,7 @@
     </p:spTree>
     <p:extLst>
       <p:ext uri="{BB962C8B-B14F-4D97-AF65-F5344CB8AC3E}">
-        <p14:creationId xmlns:p14="http://schemas.microsoft.com/office/powerpoint/2010/main" val="1231968828"/>
+        <p14:creationId xmlns:p14="http://schemas.microsoft.com/office/powerpoint/2010/main" val="3727822246"/>
       </p:ext>
     </p:extLst>
   </p:cSld>
@@ -7316,7 +7347,13 @@
   <p:cSld>
     <p:spTree>
       <p:nvGrpSpPr>
-        <p:cNvPr id="1" name=""/>
+        <p:cNvPr id="1" name="">
+          <a:extLst>
+            <a:ext uri="{FF2B5EF4-FFF2-40B4-BE49-F238E27FC236}">
+              <a16:creationId xmlns:a16="http://schemas.microsoft.com/office/drawing/2014/main" id="{B6BC2008-D364-398F-4CCC-4306088D906A}"/>
+            </a:ext>
+          </a:extLst>
+        </p:cNvPr>
         <p:cNvGrpSpPr/>
         <p:nvPr/>
       </p:nvGrpSpPr>
@@ -7330,7 +7367,13 @@
       </p:grpSpPr>
       <p:sp>
         <p:nvSpPr>
-          <p:cNvPr id="2" name="Title 1"/>
+          <p:cNvPr id="2" name="Title 1">
+            <a:extLst>
+              <a:ext uri="{FF2B5EF4-FFF2-40B4-BE49-F238E27FC236}">
+                <a16:creationId xmlns:a16="http://schemas.microsoft.com/office/drawing/2014/main" id="{9C66575F-A058-9C55-638D-FCC222974487}"/>
+              </a:ext>
+            </a:extLst>
+          </p:cNvPr>
           <p:cNvSpPr>
             <a:spLocks noGrp="1"/>
           </p:cNvSpPr>
@@ -7352,14 +7395,20 @@
             </a:br>
             <a:r>
               <a:rPr lang="en-US" sz="2800" i="1" dirty="0"/>
-              <a:t>Roadmap</a:t>
-            </a:r>
-          </a:p>
-        </p:txBody>
-      </p:sp>
-      <p:sp>
-        <p:nvSpPr>
-          <p:cNvPr id="3" name="Content Placeholder 2"/>
+              <a:t>New in version 0.11</a:t>
+            </a:r>
+          </a:p>
+        </p:txBody>
+      </p:sp>
+      <p:sp>
+        <p:nvSpPr>
+          <p:cNvPr id="3" name="Content Placeholder 2">
+            <a:extLst>
+              <a:ext uri="{FF2B5EF4-FFF2-40B4-BE49-F238E27FC236}">
+                <a16:creationId xmlns:a16="http://schemas.microsoft.com/office/drawing/2014/main" id="{97BED489-9A47-0F00-868A-40F39EB89B0D}"/>
+              </a:ext>
+            </a:extLst>
+          </p:cNvPr>
           <p:cNvSpPr>
             <a:spLocks noGrp="1"/>
           </p:cNvSpPr>
@@ -7376,114 +7425,118 @@
           <a:p>
             <a:r>
               <a:rPr lang="en-US" dirty="0"/>
-              <a:t>Started:</a:t>
+              <a:t>Better Enum support</a:t>
             </a:r>
           </a:p>
           <a:p>
             <a:pPr lvl="1"/>
             <a:r>
               <a:rPr lang="en-US" dirty="0"/>
-              <a:t>Wiki pages: List of servers that have been integrated</a:t>
-            </a:r>
-            <a:br>
-              <a:rPr lang="en-US" dirty="0"/>
-            </a:br>
-            <a:r>
-              <a:rPr lang="en-US" dirty="0"/>
-              <a:t>Useful tricks and hints</a:t>
-            </a:r>
-          </a:p>
-          <a:p>
-            <a:r>
-              <a:rPr lang="en-US" dirty="0"/>
-              <a:t>Currently:</a:t>
+              <a:t>Automatic choice strings from server</a:t>
             </a:r>
           </a:p>
           <a:p>
             <a:pPr lvl="1"/>
             <a:r>
               <a:rPr lang="en-US" dirty="0"/>
-              <a:t>User Manual </a:t>
-            </a:r>
-            <a:r>
-              <a:rPr lang="en-US" i="1" dirty="0"/>
-              <a:t>(Ralph)</a:t>
-            </a:r>
-            <a:br>
-              <a:rPr lang="en-US" dirty="0"/>
-            </a:br>
-            <a:r>
-              <a:rPr lang="en-US" dirty="0"/>
-              <a:t>~30% done: integration of current READMEs and Cheat Sheet</a:t>
+              <a:t>For string and </a:t>
+            </a:r>
+            <a:r>
+              <a:rPr lang="en-US" dirty="0" err="1"/>
+              <a:t>mbbi</a:t>
+            </a:r>
+            <a:r>
+              <a:rPr lang="en-US" dirty="0"/>
+              <a:t>/</a:t>
+            </a:r>
+            <a:r>
+              <a:rPr lang="en-US" dirty="0" err="1"/>
+              <a:t>mbbo</a:t>
+            </a:r>
+            <a:r>
+              <a:rPr lang="en-US" dirty="0"/>
+              <a:t> records</a:t>
+            </a:r>
+          </a:p>
+          <a:p>
+            <a:r>
+              <a:rPr lang="en-US" dirty="0"/>
+              <a:t>Support for OPC UA Unions and </a:t>
+            </a:r>
+            <a:r>
+              <a:rPr lang="en-US" dirty="0" err="1"/>
+              <a:t>OptStructs</a:t>
+            </a:r>
+            <a:endParaRPr lang="en-US" dirty="0"/>
+          </a:p>
+          <a:p>
+            <a:r>
+              <a:rPr lang="en-US" dirty="0"/>
+              <a:t>More OPC UA string types</a:t>
             </a:r>
           </a:p>
           <a:p>
             <a:pPr lvl="1"/>
             <a:r>
-              <a:rPr lang="en-US" dirty="0"/>
-              <a:t>Server-side deadband filters </a:t>
-            </a:r>
-            <a:r>
-              <a:rPr lang="en-US" i="1" dirty="0"/>
-              <a:t>(Dirk)</a:t>
+              <a:rPr lang="en-US" dirty="0" err="1"/>
+              <a:t>LocalizedText</a:t>
+            </a:r>
+            <a:r>
+              <a:rPr lang="en-US" dirty="0"/>
+              <a:t> and </a:t>
+            </a:r>
+            <a:r>
+              <a:rPr lang="en-US" dirty="0" err="1"/>
+              <a:t>QualifiedName</a:t>
+            </a:r>
+            <a:r>
+              <a:rPr lang="en-US" dirty="0"/>
+              <a:t> (as string or structure)</a:t>
             </a:r>
           </a:p>
           <a:p>
             <a:pPr lvl="1"/>
             <a:r>
-              <a:rPr lang="en-US" dirty="0"/>
-              <a:t>Better </a:t>
-            </a:r>
-            <a:r>
               <a:rPr lang="en-US" dirty="0" err="1"/>
-              <a:t>enum</a:t>
-            </a:r>
-            <a:r>
-              <a:rPr lang="en-US" dirty="0"/>
-              <a:t> support (read choices from server) </a:t>
-            </a:r>
-            <a:r>
-              <a:rPr lang="en-US" i="1" dirty="0"/>
-              <a:t>(Dirk)</a:t>
-            </a:r>
-            <a:endParaRPr lang="en-GB" i="1" dirty="0"/>
-          </a:p>
-          <a:p>
-            <a:r>
-              <a:rPr lang="en-US" dirty="0"/>
-              <a:t>Soon:</a:t>
+              <a:t>XmlElement</a:t>
+            </a:r>
+            <a:r>
+              <a:rPr lang="en-US" dirty="0"/>
+              <a:t> (as string)</a:t>
             </a:r>
           </a:p>
           <a:p>
             <a:pPr lvl="1"/>
             <a:r>
-              <a:rPr lang="en-US" dirty="0"/>
-              <a:t>Support for OPC UA methods (remote execution of PLC code) </a:t>
-            </a:r>
-            <a:r>
-              <a:rPr lang="en-US" i="1" dirty="0"/>
-              <a:t>(Ralph)</a:t>
+              <a:rPr lang="en-US" dirty="0" err="1"/>
+              <a:t>ByteString</a:t>
+            </a:r>
+            <a:r>
+              <a:rPr lang="en-US" dirty="0"/>
+              <a:t> (as hex string or UCHAR array)</a:t>
+            </a:r>
+          </a:p>
+          <a:p>
+            <a:r>
+              <a:rPr lang="en-US" dirty="0"/>
+              <a:t>Server-side deadband filters</a:t>
             </a:r>
           </a:p>
           <a:p>
             <a:pPr lvl="1"/>
-            <a:r>
-              <a:rPr lang="en-US" dirty="0"/>
-              <a:t>Support for servers that change structures on-the-fly </a:t>
-            </a:r>
-            <a:r>
-              <a:rPr lang="en-US" i="1" dirty="0"/>
-              <a:t>(Karl)</a:t>
-            </a:r>
-          </a:p>
-          <a:p>
-            <a:endParaRPr lang="en-US" dirty="0"/>
-          </a:p>
-        </p:txBody>
-      </p:sp>
-      <p:sp>
-        <p:nvSpPr>
-          <p:cNvPr id="4" name="Slide Number Placeholder 3"/>
+            <a:endParaRPr lang="en-US" i="1" dirty="0"/>
+          </a:p>
+        </p:txBody>
+      </p:sp>
+      <p:sp>
+        <p:nvSpPr>
+          <p:cNvPr id="4" name="Slide Number Placeholder 3">
+            <a:extLst>
+              <a:ext uri="{FF2B5EF4-FFF2-40B4-BE49-F238E27FC236}">
+                <a16:creationId xmlns:a16="http://schemas.microsoft.com/office/drawing/2014/main" id="{0F3369F8-5CD5-44A2-A17F-68F9D88E8B20}"/>
+              </a:ext>
+            </a:extLst>
+          </p:cNvPr>
           <p:cNvSpPr>
             <a:spLocks noGrp="1"/>
           </p:cNvSpPr>
@@ -7507,7 +7560,7 @@
     </p:spTree>
     <p:extLst>
       <p:ext uri="{BB962C8B-B14F-4D97-AF65-F5344CB8AC3E}">
-        <p14:creationId xmlns:p14="http://schemas.microsoft.com/office/powerpoint/2010/main" val="1934327163"/>
+        <p14:creationId xmlns:p14="http://schemas.microsoft.com/office/powerpoint/2010/main" val="382396999"/>
       </p:ext>
     </p:extLst>
   </p:cSld>
@@ -7558,7 +7611,7 @@
             </a:br>
             <a:r>
               <a:rPr lang="en-US" sz="2800" i="1" dirty="0"/>
-              <a:t>Download</a:t>
+              <a:t>Roadmap</a:t>
             </a:r>
           </a:p>
         </p:txBody>
@@ -7582,84 +7635,88 @@
           <a:p>
             <a:r>
               <a:rPr lang="en-US" dirty="0"/>
-              <a:t>Device Support under EPICS license</a:t>
-            </a:r>
-          </a:p>
-          <a:p>
-            <a:r>
-              <a:rPr lang="en-US" dirty="0"/>
-              <a:t>Upstream repository, Wiki pages, binaries, (future manual):</a:t>
+              <a:t>Started:</a:t>
+            </a:r>
+          </a:p>
+          <a:p>
+            <a:pPr lvl="1"/>
+            <a:r>
+              <a:rPr lang="en-US" dirty="0"/>
+              <a:t>Wiki pages: List of servers that have been integrated</a:t>
             </a:r>
             <a:br>
               <a:rPr lang="en-US" dirty="0"/>
             </a:br>
             <a:r>
-              <a:rPr lang="en-US" dirty="0">
-                <a:hlinkClick r:id="rId2"/>
-              </a:rPr>
-              <a:t>https://github.com/epics-modules/opcua</a:t>
-            </a:r>
-            <a:endParaRPr lang="en-US" dirty="0"/>
-          </a:p>
-          <a:p>
-            <a:pPr marL="0" indent="0">
-              <a:buNone/>
-            </a:pPr>
-            <a:endParaRPr lang="en-US" sz="2200" dirty="0"/>
-          </a:p>
-          <a:p>
-            <a:pPr>
-              <a:buSzPct val="100000"/>
-              <a:buFont typeface="Arial" panose="020B0604020202020204" pitchFamily="34" charset="0"/>
-              <a:buChar char="‼"/>
-            </a:pPr>
-            <a:r>
-              <a:rPr lang="en-US" dirty="0"/>
-              <a:t>The GitHub download area has statically linked shared libraries containing the Unified Automation SDK client</a:t>
+              <a:rPr lang="en-US" dirty="0"/>
+              <a:t>Useful tricks and hints</a:t>
+            </a:r>
+          </a:p>
+          <a:p>
+            <a:r>
+              <a:rPr lang="en-US" dirty="0"/>
+              <a:t>Currently:</a:t>
+            </a:r>
+          </a:p>
+          <a:p>
+            <a:pPr lvl="1"/>
+            <a:r>
+              <a:rPr lang="en-US" dirty="0"/>
+              <a:t>User Manual </a:t>
+            </a:r>
+            <a:r>
+              <a:rPr lang="en-US" i="1" dirty="0"/>
+              <a:t>(Ralph)</a:t>
             </a:r>
             <a:br>
               <a:rPr lang="en-US" dirty="0"/>
             </a:br>
             <a:r>
               <a:rPr lang="en-US" dirty="0"/>
-              <a:t>(i.e., plug-in libraries to link your IOCs against)</a:t>
+              <a:t>~30% done: integration of current READMEs and Cheat Sheet</a:t>
             </a:r>
           </a:p>
           <a:p>
             <a:pPr lvl="1"/>
             <a:r>
               <a:rPr lang="en-US" dirty="0"/>
-              <a:t>Easy to use, fully functional, free forever</a:t>
+              <a:t>Support for array/matrix slicing and arrays of structures </a:t>
+            </a:r>
+            <a:r>
+              <a:rPr lang="en-US" i="1" dirty="0"/>
+              <a:t>(Dirk)</a:t>
+            </a:r>
+            <a:endParaRPr lang="en-GB" i="1" dirty="0"/>
+          </a:p>
+          <a:p>
+            <a:r>
+              <a:rPr lang="en-US" dirty="0"/>
+              <a:t>Soon:</a:t>
             </a:r>
           </a:p>
           <a:p>
             <a:pPr lvl="1"/>
             <a:r>
               <a:rPr lang="en-US" dirty="0"/>
-              <a:t>Needs to match exactly your Linux distro and EPICS Base</a:t>
+              <a:t>Support for OPC UA methods (remote execution of PLC code) </a:t>
+            </a:r>
+            <a:r>
+              <a:rPr lang="en-US" i="1" dirty="0"/>
+              <a:t>(Ralph)</a:t>
             </a:r>
           </a:p>
           <a:p>
             <a:pPr lvl="1"/>
             <a:r>
               <a:rPr lang="en-US" dirty="0"/>
-              <a:t>Used in the hands-on part</a:t>
-            </a:r>
-          </a:p>
-          <a:p>
-            <a:pPr marL="0" indent="0">
-              <a:buNone/>
-            </a:pPr>
-            <a:endParaRPr lang="en-GB" dirty="0"/>
-          </a:p>
-          <a:p>
-            <a:pPr marL="0" indent="0">
-              <a:buSzPct val="100000"/>
-              <a:buNone/>
-            </a:pPr>
-            <a:br>
-              <a:rPr lang="en-US" dirty="0"/>
-            </a:br>
+              <a:t>Support for servers that change structures on-the-fly </a:t>
+            </a:r>
+            <a:r>
+              <a:rPr lang="en-US" i="1" dirty="0"/>
+              <a:t>(Karl)</a:t>
+            </a:r>
+          </a:p>
+          <a:p>
             <a:endParaRPr lang="en-US" dirty="0"/>
           </a:p>
         </p:txBody>
@@ -7690,7 +7747,7 @@
     </p:spTree>
     <p:extLst>
       <p:ext uri="{BB962C8B-B14F-4D97-AF65-F5344CB8AC3E}">
-        <p14:creationId xmlns:p14="http://schemas.microsoft.com/office/powerpoint/2010/main" val="2954288839"/>
+        <p14:creationId xmlns:p14="http://schemas.microsoft.com/office/powerpoint/2010/main" val="676055583"/>
       </p:ext>
     </p:extLst>
   </p:cSld>
@@ -7734,11 +7791,194 @@
           <a:p>
             <a:r>
               <a:rPr lang="en-US" dirty="0"/>
+              <a:t>EPICS Device Support Module</a:t>
+            </a:r>
+            <a:br>
+              <a:rPr lang="en-US" dirty="0"/>
+            </a:br>
+            <a:r>
+              <a:rPr lang="en-US" sz="2800" i="1" dirty="0"/>
+              <a:t>Download</a:t>
+            </a:r>
+          </a:p>
+        </p:txBody>
+      </p:sp>
+      <p:sp>
+        <p:nvSpPr>
+          <p:cNvPr id="3" name="Content Placeholder 2"/>
+          <p:cNvSpPr>
+            <a:spLocks noGrp="1"/>
+          </p:cNvSpPr>
+          <p:nvPr>
+            <p:ph idx="1"/>
+          </p:nvPr>
+        </p:nvSpPr>
+        <p:spPr/>
+        <p:txBody>
+          <a:bodyPr>
+            <a:noAutofit/>
+          </a:bodyPr>
+          <a:lstStyle/>
+          <a:p>
+            <a:r>
+              <a:rPr lang="en-US" dirty="0"/>
+              <a:t>Device Support under EPICS license</a:t>
+            </a:r>
+          </a:p>
+          <a:p>
+            <a:r>
+              <a:rPr lang="en-US" dirty="0"/>
+              <a:t>Upstream repository, Wiki pages, binaries, (future manual):</a:t>
+            </a:r>
+            <a:br>
+              <a:rPr lang="en-US" dirty="0"/>
+            </a:br>
+            <a:r>
+              <a:rPr lang="en-US" dirty="0">
+                <a:hlinkClick r:id="rId2"/>
+              </a:rPr>
+              <a:t>https://github.com/epics-modules/opcua</a:t>
+            </a:r>
+            <a:endParaRPr lang="en-US" dirty="0"/>
+          </a:p>
+          <a:p>
+            <a:pPr marL="0" indent="0">
+              <a:buNone/>
+            </a:pPr>
+            <a:endParaRPr lang="en-US" sz="2200" dirty="0"/>
+          </a:p>
+          <a:p>
+            <a:pPr>
+              <a:buSzPct val="100000"/>
+              <a:buFont typeface="Arial" panose="020B0604020202020204" pitchFamily="34" charset="0"/>
+              <a:buChar char="‼"/>
+            </a:pPr>
+            <a:r>
+              <a:rPr lang="en-US" dirty="0"/>
+              <a:t>The GitHub download area has statically linked shared libraries containing the Unified Automation SDK client</a:t>
+            </a:r>
+            <a:br>
+              <a:rPr lang="en-US" dirty="0"/>
+            </a:br>
+            <a:r>
+              <a:rPr lang="en-US" dirty="0"/>
+              <a:t>(i.e., plug-in libraries to link your IOCs against)</a:t>
+            </a:r>
+          </a:p>
+          <a:p>
+            <a:pPr lvl="1"/>
+            <a:r>
+              <a:rPr lang="en-US" dirty="0"/>
+              <a:t>Easy to use, fully functional, free forever</a:t>
+            </a:r>
+          </a:p>
+          <a:p>
+            <a:pPr lvl="1"/>
+            <a:r>
+              <a:rPr lang="en-US" dirty="0"/>
+              <a:t>Needs to match exactly your Linux distro and EPICS Base</a:t>
+            </a:r>
+          </a:p>
+          <a:p>
+            <a:pPr lvl="1"/>
+            <a:r>
+              <a:rPr lang="en-US" dirty="0"/>
+              <a:t>Used in the hands-on part</a:t>
+            </a:r>
+          </a:p>
+          <a:p>
+            <a:pPr marL="0" indent="0">
+              <a:buNone/>
+            </a:pPr>
+            <a:endParaRPr lang="en-GB" dirty="0"/>
+          </a:p>
+          <a:p>
+            <a:pPr marL="0" indent="0">
+              <a:buSzPct val="100000"/>
+              <a:buNone/>
+            </a:pPr>
+            <a:br>
+              <a:rPr lang="en-US" dirty="0"/>
+            </a:br>
+            <a:endParaRPr lang="en-US" dirty="0"/>
+          </a:p>
+        </p:txBody>
+      </p:sp>
+      <p:sp>
+        <p:nvSpPr>
+          <p:cNvPr id="4" name="Slide Number Placeholder 3"/>
+          <p:cNvSpPr>
+            <a:spLocks noGrp="1"/>
+          </p:cNvSpPr>
+          <p:nvPr>
+            <p:ph type="sldNum" sz="quarter" idx="12"/>
+          </p:nvPr>
+        </p:nvSpPr>
+        <p:spPr/>
+        <p:txBody>
+          <a:bodyPr/>
+          <a:lstStyle/>
+          <a:p>
+            <a:fld id="{D57F1E4F-1CFF-5643-939E-02111984F565}" type="slidenum">
+              <a:rPr lang="en-US" smtClean="0"/>
+              <a:t>15</a:t>
+            </a:fld>
+            <a:endParaRPr lang="en-US" dirty="0"/>
+          </a:p>
+        </p:txBody>
+      </p:sp>
+    </p:spTree>
+    <p:extLst>
+      <p:ext uri="{BB962C8B-B14F-4D97-AF65-F5344CB8AC3E}">
+        <p14:creationId xmlns:p14="http://schemas.microsoft.com/office/powerpoint/2010/main" val="2954288839"/>
+      </p:ext>
+    </p:extLst>
+  </p:cSld>
+  <p:clrMapOvr>
+    <a:masterClrMapping/>
+  </p:clrMapOvr>
+</p:sld>
+</file>
+
+<file path=ppt/slides/slide16.xml><?xml version="1.0" encoding="utf-8"?>
+<p:sld xmlns:a="http://schemas.openxmlformats.org/drawingml/2006/main" xmlns:r="http://schemas.openxmlformats.org/officeDocument/2006/relationships" xmlns:p="http://schemas.openxmlformats.org/presentationml/2006/main">
+  <p:cSld>
+    <p:spTree>
+      <p:nvGrpSpPr>
+        <p:cNvPr id="1" name=""/>
+        <p:cNvGrpSpPr/>
+        <p:nvPr/>
+      </p:nvGrpSpPr>
+      <p:grpSpPr>
+        <a:xfrm>
+          <a:off x="0" y="0"/>
+          <a:ext cx="0" cy="0"/>
+          <a:chOff x="0" y="0"/>
+          <a:chExt cx="0" cy="0"/>
+        </a:xfrm>
+      </p:grpSpPr>
+      <p:sp>
+        <p:nvSpPr>
+          <p:cNvPr id="2" name="Title 1"/>
+          <p:cNvSpPr>
+            <a:spLocks noGrp="1"/>
+          </p:cNvSpPr>
+          <p:nvPr>
+            <p:ph type="title"/>
+          </p:nvPr>
+        </p:nvSpPr>
+        <p:spPr/>
+        <p:txBody>
+          <a:bodyPr/>
+          <a:lstStyle/>
+          <a:p>
+            <a:r>
+              <a:rPr lang="en-US" dirty="0"/>
               <a:t>Users </a:t>
             </a:r>
             <a:r>
               <a:rPr lang="en-US" sz="2800" i="1" dirty="0"/>
-              <a:t>(2022)</a:t>
+              <a:t>(as known)</a:t>
             </a:r>
           </a:p>
         </p:txBody>
@@ -7749,13 +7989,7 @@
           <p:cNvGraphicFramePr>
             <a:graphicFrameLocks noGrp="1"/>
           </p:cNvGraphicFramePr>
-          <p:nvPr>
-            <p:extLst>
-              <p:ext uri="{D42A27DB-BD31-4B8C-83A1-F6EECF244321}">
-                <p14:modId xmlns:p14="http://schemas.microsoft.com/office/powerpoint/2010/main" val="4165989185"/>
-              </p:ext>
-            </p:extLst>
-          </p:nvPr>
+          <p:nvPr/>
         </p:nvGraphicFramePr>
         <p:xfrm>
           <a:off x="646111" y="1164542"/>
@@ -7887,12 +8121,12 @@
                         </a:spcAft>
                       </a:pPr>
                       <a:r>
-                        <a:rPr lang="en-US" sz="1600" kern="800" dirty="0">
+                        <a:rPr lang="en-US" sz="1400" kern="800" dirty="0">
                           <a:effectLst/>
                         </a:rPr>
                         <a:t>ASIPP</a:t>
                       </a:r>
-                      <a:endParaRPr lang="en-GB" sz="1600" kern="800" dirty="0">
+                      <a:endParaRPr lang="en-GB" sz="1400" kern="800" dirty="0">
                         <a:effectLst/>
                         <a:latin typeface="Times" panose="02020603050405020304" pitchFamily="18" charset="0"/>
                         <a:ea typeface="Times New Roman" panose="02020603050405020304" pitchFamily="18" charset="0"/>
@@ -7913,12 +8147,12 @@
                         </a:spcAft>
                       </a:pPr>
                       <a:r>
-                        <a:rPr lang="en-US" sz="1600" kern="800">
+                        <a:rPr lang="en-US" sz="1400" kern="800">
                           <a:effectLst/>
                         </a:rPr>
                         <a:t>LabVIEW</a:t>
                       </a:r>
-                      <a:endParaRPr lang="en-GB" sz="1600" kern="800">
+                      <a:endParaRPr lang="en-GB" sz="1400" kern="800">
                         <a:effectLst/>
                         <a:latin typeface="Times" panose="02020603050405020304" pitchFamily="18" charset="0"/>
                         <a:ea typeface="Times New Roman" panose="02020603050405020304" pitchFamily="18" charset="0"/>
@@ -7939,7 +8173,7 @@
                         </a:spcAft>
                       </a:pPr>
                       <a:r>
-                        <a:rPr lang="en-US" sz="1600" b="1" kern="800" dirty="0">
+                        <a:rPr lang="en-US" sz="1400" b="1" kern="800" dirty="0">
                           <a:solidFill>
                             <a:srgbClr val="92D050"/>
                           </a:solidFill>
@@ -7947,7 +8181,7 @@
                         </a:rPr>
                         <a:t>production</a:t>
                       </a:r>
-                      <a:endParaRPr lang="en-GB" sz="1600" b="1" kern="800" dirty="0">
+                      <a:endParaRPr lang="en-GB" sz="1400" b="1" kern="800" dirty="0">
                         <a:solidFill>
                           <a:srgbClr val="92D050"/>
                         </a:solidFill>
@@ -7978,12 +8212,12 @@
                         </a:spcAft>
                       </a:pPr>
                       <a:r>
-                        <a:rPr lang="en-US" sz="1600" kern="800" dirty="0">
+                        <a:rPr lang="en-US" sz="1400" kern="800" dirty="0">
                           <a:effectLst/>
                         </a:rPr>
                         <a:t> </a:t>
                       </a:r>
-                      <a:endParaRPr lang="en-GB" sz="1600" kern="800" dirty="0">
+                      <a:endParaRPr lang="en-GB" sz="1400" kern="800" dirty="0">
                         <a:effectLst/>
                         <a:latin typeface="Times" panose="02020603050405020304" pitchFamily="18" charset="0"/>
                         <a:ea typeface="Times New Roman" panose="02020603050405020304" pitchFamily="18" charset="0"/>
@@ -8004,24 +8238,24 @@
                         </a:spcAft>
                       </a:pPr>
                       <a:r>
-                        <a:rPr lang="en-US" sz="1600" kern="800" dirty="0">
+                        <a:rPr lang="en-US" sz="1400" kern="800" dirty="0">
                           <a:effectLst/>
                         </a:rPr>
                         <a:t>PLC Siemens</a:t>
                       </a:r>
                       <a:r>
-                        <a:rPr lang="en-US" sz="1600" kern="800" baseline="0" dirty="0">
+                        <a:rPr lang="en-US" sz="1400" kern="800" baseline="0" dirty="0">
                           <a:effectLst/>
                         </a:rPr>
                         <a:t> </a:t>
                       </a:r>
                       <a:r>
-                        <a:rPr lang="en-US" sz="1600" kern="800" dirty="0">
+                        <a:rPr lang="en-US" sz="1400" kern="800" dirty="0">
                           <a:effectLst/>
                         </a:rPr>
                         <a:t>S7-1500</a:t>
                       </a:r>
-                      <a:endParaRPr lang="en-GB" sz="1600" kern="800" dirty="0">
+                      <a:endParaRPr lang="en-GB" sz="1400" kern="800" dirty="0">
                         <a:effectLst/>
                         <a:latin typeface="Times" panose="02020603050405020304" pitchFamily="18" charset="0"/>
                         <a:ea typeface="Times New Roman" panose="02020603050405020304" pitchFamily="18" charset="0"/>
@@ -8042,7 +8276,7 @@
                         </a:spcAft>
                       </a:pPr>
                       <a:r>
-                        <a:rPr lang="en-US" sz="1600" b="1" kern="800" dirty="0">
+                        <a:rPr lang="en-US" sz="1400" b="1" kern="800" dirty="0">
                           <a:solidFill>
                             <a:srgbClr val="92D050"/>
                           </a:solidFill>
@@ -8050,7 +8284,7 @@
                         </a:rPr>
                         <a:t>production</a:t>
                       </a:r>
-                      <a:endParaRPr lang="en-GB" sz="1600" b="1" kern="800" dirty="0">
+                      <a:endParaRPr lang="en-GB" sz="1400" b="1" kern="800" dirty="0">
                         <a:solidFill>
                           <a:srgbClr val="92D050"/>
                         </a:solidFill>
@@ -8081,12 +8315,12 @@
                         </a:spcAft>
                       </a:pPr>
                       <a:r>
-                        <a:rPr lang="en-US" sz="1600" kern="800" dirty="0">
+                        <a:rPr lang="en-US" sz="1400" kern="800" dirty="0">
                           <a:effectLst/>
                         </a:rPr>
                         <a:t>Australian Synchrotron</a:t>
                       </a:r>
-                      <a:endParaRPr lang="en-GB" sz="1600" kern="800" dirty="0">
+                      <a:endParaRPr lang="en-GB" sz="1400" kern="800" dirty="0">
                         <a:effectLst/>
                         <a:latin typeface="Times" panose="02020603050405020304" pitchFamily="18" charset="0"/>
                         <a:ea typeface="Times New Roman" panose="02020603050405020304" pitchFamily="18" charset="0"/>
@@ -8107,24 +8341,24 @@
                         </a:spcAft>
                       </a:pPr>
                       <a:r>
-                        <a:rPr lang="en-US" sz="1600" kern="800" dirty="0">
+                        <a:rPr lang="en-US" sz="1400" kern="800" dirty="0">
                           <a:effectLst/>
                         </a:rPr>
                         <a:t>PLC Siemens</a:t>
                       </a:r>
                       <a:r>
-                        <a:rPr lang="en-US" sz="1600" kern="800" baseline="0" dirty="0">
+                        <a:rPr lang="en-US" sz="1400" kern="800" baseline="0" dirty="0">
                           <a:effectLst/>
                         </a:rPr>
                         <a:t> </a:t>
                       </a:r>
                       <a:r>
-                        <a:rPr lang="en-US" sz="1600" kern="800" dirty="0">
+                        <a:rPr lang="en-US" sz="1400" kern="800" dirty="0">
                           <a:effectLst/>
                         </a:rPr>
                         <a:t>S7-1500F</a:t>
                       </a:r>
-                      <a:endParaRPr lang="en-GB" sz="1600" kern="800" dirty="0">
+                      <a:endParaRPr lang="en-GB" sz="1400" kern="800" dirty="0">
                         <a:effectLst/>
                         <a:latin typeface="Times" panose="02020603050405020304" pitchFamily="18" charset="0"/>
                         <a:ea typeface="Times New Roman" panose="02020603050405020304" pitchFamily="18" charset="0"/>
@@ -8145,12 +8379,12 @@
                         </a:spcAft>
                       </a:pPr>
                       <a:r>
-                        <a:rPr lang="en-US" sz="1600" kern="800" dirty="0">
+                        <a:rPr lang="en-US" sz="1400" kern="800" dirty="0">
                           <a:effectLst/>
                         </a:rPr>
                         <a:t>near production</a:t>
                       </a:r>
-                      <a:endParaRPr lang="en-GB" sz="1600" kern="800" dirty="0">
+                      <a:endParaRPr lang="en-GB" sz="1400" kern="800" dirty="0">
                         <a:effectLst/>
                         <a:latin typeface="Times" panose="02020603050405020304" pitchFamily="18" charset="0"/>
                         <a:ea typeface="Times New Roman" panose="02020603050405020304" pitchFamily="18" charset="0"/>
@@ -8178,12 +8412,12 @@
                         </a:spcAft>
                       </a:pPr>
                       <a:r>
-                        <a:rPr lang="en-US" sz="1600" kern="800" dirty="0">
+                        <a:rPr lang="en-US" sz="1400" kern="800" dirty="0">
                           <a:effectLst/>
                         </a:rPr>
                         <a:t>BESSY II @HZB</a:t>
                       </a:r>
-                      <a:endParaRPr lang="en-GB" sz="1600" kern="800" dirty="0">
+                      <a:endParaRPr lang="en-GB" sz="1400" kern="800" dirty="0">
                         <a:effectLst/>
                         <a:latin typeface="Times" panose="02020603050405020304" pitchFamily="18" charset="0"/>
                         <a:ea typeface="Times New Roman" panose="02020603050405020304" pitchFamily="18" charset="0"/>
@@ -8204,12 +8438,12 @@
                         </a:spcAft>
                       </a:pPr>
                       <a:r>
-                        <a:rPr lang="en-US" sz="1600" kern="800" dirty="0">
+                        <a:rPr lang="en-US" sz="1400" kern="800" dirty="0">
                           <a:effectLst/>
                         </a:rPr>
                         <a:t>PLC Siemens S7-1500</a:t>
                       </a:r>
-                      <a:endParaRPr lang="en-GB" sz="1600" kern="800" dirty="0">
+                      <a:endParaRPr lang="en-GB" sz="1400" kern="800" dirty="0">
                         <a:effectLst/>
                         <a:latin typeface="Times" panose="02020603050405020304" pitchFamily="18" charset="0"/>
                         <a:ea typeface="Times New Roman" panose="02020603050405020304" pitchFamily="18" charset="0"/>
@@ -8242,7 +8476,7 @@
                         <a:defRPr/>
                       </a:pPr>
                       <a:r>
-                        <a:rPr lang="en-US" sz="1600" b="1" kern="800" dirty="0">
+                        <a:rPr lang="en-US" sz="1400" b="1" kern="800" dirty="0">
                           <a:solidFill>
                             <a:srgbClr val="92D050"/>
                           </a:solidFill>
@@ -8250,7 +8484,7 @@
                         </a:rPr>
                         <a:t>production</a:t>
                       </a:r>
-                      <a:endParaRPr lang="en-GB" sz="1600" b="1" kern="800" dirty="0">
+                      <a:endParaRPr lang="en-GB" sz="1400" b="1" kern="800" dirty="0">
                         <a:solidFill>
                           <a:srgbClr val="92D050"/>
                         </a:solidFill>
@@ -8281,12 +8515,12 @@
                         </a:spcAft>
                       </a:pPr>
                       <a:r>
-                        <a:rPr lang="en-US" sz="1600" kern="800">
+                        <a:rPr lang="en-US" sz="1400" kern="800" dirty="0">
                           <a:effectLst/>
                         </a:rPr>
                         <a:t> </a:t>
                       </a:r>
-                      <a:endParaRPr lang="en-GB" sz="1600" kern="800">
+                      <a:endParaRPr lang="en-GB" sz="1400" kern="800" dirty="0">
                         <a:effectLst/>
                         <a:latin typeface="Times" panose="02020603050405020304" pitchFamily="18" charset="0"/>
                         <a:ea typeface="Times New Roman" panose="02020603050405020304" pitchFamily="18" charset="0"/>
@@ -8307,12 +8541,12 @@
                         </a:spcAft>
                       </a:pPr>
                       <a:r>
-                        <a:rPr lang="en-US" sz="1600" kern="800" dirty="0">
+                        <a:rPr lang="en-US" sz="1400" kern="800" dirty="0">
                           <a:effectLst/>
                         </a:rPr>
                         <a:t>Phoenix Contact</a:t>
                       </a:r>
-                      <a:endParaRPr lang="en-GB" sz="1600" kern="800" dirty="0">
+                      <a:endParaRPr lang="en-GB" sz="1400" kern="800" dirty="0">
                         <a:effectLst/>
                         <a:latin typeface="Times" panose="02020603050405020304" pitchFamily="18" charset="0"/>
                         <a:ea typeface="Times New Roman" panose="02020603050405020304" pitchFamily="18" charset="0"/>
@@ -8345,7 +8579,7 @@
                         <a:defRPr/>
                       </a:pPr>
                       <a:r>
-                        <a:rPr lang="en-US" sz="1600" b="1" kern="800" dirty="0">
+                        <a:rPr lang="en-US" sz="1400" b="1" kern="800" dirty="0">
                           <a:solidFill>
                             <a:srgbClr val="92D050"/>
                           </a:solidFill>
@@ -8353,7 +8587,7 @@
                         </a:rPr>
                         <a:t>production</a:t>
                       </a:r>
-                      <a:endParaRPr lang="en-GB" sz="1600" b="1" kern="800" dirty="0">
+                      <a:endParaRPr lang="en-GB" sz="1400" b="1" kern="800" dirty="0">
                         <a:solidFill>
                           <a:srgbClr val="92D050"/>
                         </a:solidFill>
@@ -8384,12 +8618,12 @@
                         </a:spcAft>
                       </a:pPr>
                       <a:r>
-                        <a:rPr lang="en-US" sz="1600" kern="800">
+                        <a:rPr lang="en-US" sz="1400" kern="800" dirty="0">
                           <a:effectLst/>
                         </a:rPr>
                         <a:t> </a:t>
                       </a:r>
-                      <a:endParaRPr lang="en-GB" sz="1600" kern="800">
+                      <a:endParaRPr lang="en-GB" sz="1400" kern="800" dirty="0">
                         <a:effectLst/>
                         <a:latin typeface="Times" panose="02020603050405020304" pitchFamily="18" charset="0"/>
                         <a:ea typeface="Times New Roman" panose="02020603050405020304" pitchFamily="18" charset="0"/>
@@ -8410,24 +8644,24 @@
                         </a:spcAft>
                       </a:pPr>
                       <a:r>
-                        <a:rPr lang="en-US" sz="1600" kern="800" dirty="0" err="1">
+                        <a:rPr lang="en-US" sz="1400" kern="800" dirty="0" err="1">
                           <a:effectLst/>
                         </a:rPr>
-                        <a:t>Softing</a:t>
+                        <a:t>SoftIng</a:t>
                       </a:r>
                       <a:r>
-                        <a:rPr lang="en-US" sz="1600" kern="800" dirty="0">
+                        <a:rPr lang="en-US" sz="1400" kern="800" dirty="0">
                           <a:effectLst/>
                         </a:rPr>
                         <a:t> </a:t>
                       </a:r>
                       <a:r>
-                        <a:rPr lang="en-US" sz="1600" kern="800" dirty="0" err="1">
+                        <a:rPr lang="en-US" sz="1400" kern="800" dirty="0" err="1">
                           <a:effectLst/>
                         </a:rPr>
                         <a:t>uaGate</a:t>
                       </a:r>
-                      <a:endParaRPr lang="en-GB" sz="1600" kern="800" dirty="0">
+                      <a:endParaRPr lang="en-GB" sz="1400" kern="800" dirty="0">
                         <a:effectLst/>
                         <a:latin typeface="Times" panose="02020603050405020304" pitchFamily="18" charset="0"/>
                         <a:ea typeface="Times New Roman" panose="02020603050405020304" pitchFamily="18" charset="0"/>
@@ -8448,7 +8682,7 @@
                         </a:spcAft>
                       </a:pPr>
                       <a:r>
-                        <a:rPr lang="en-US" sz="1600" b="1" kern="800" dirty="0">
+                        <a:rPr lang="en-US" sz="1400" b="1" kern="800" dirty="0">
                           <a:solidFill>
                             <a:srgbClr val="92D050"/>
                           </a:solidFill>
@@ -8456,7 +8690,7 @@
                         </a:rPr>
                         <a:t>production</a:t>
                       </a:r>
-                      <a:endParaRPr lang="en-GB" sz="1600" b="1" kern="800" dirty="0">
+                      <a:endParaRPr lang="en-GB" sz="1400" b="1" kern="800" dirty="0">
                         <a:solidFill>
                           <a:srgbClr val="92D050"/>
                         </a:solidFill>
@@ -8487,12 +8721,12 @@
                         </a:spcAft>
                       </a:pPr>
                       <a:r>
-                        <a:rPr lang="en-US" sz="1600" kern="800" dirty="0">
+                        <a:rPr lang="en-US" sz="1400" kern="800" dirty="0">
                           <a:effectLst/>
                         </a:rPr>
                         <a:t>CHIMERA @CCFE</a:t>
                       </a:r>
-                      <a:endParaRPr lang="en-GB" sz="1600" kern="800" dirty="0">
+                      <a:endParaRPr lang="en-GB" sz="1400" kern="800" dirty="0">
                         <a:effectLst/>
                         <a:latin typeface="Times" panose="02020603050405020304" pitchFamily="18" charset="0"/>
                         <a:ea typeface="Times New Roman" panose="02020603050405020304" pitchFamily="18" charset="0"/>
@@ -8513,12 +8747,12 @@
                         </a:spcAft>
                       </a:pPr>
                       <a:r>
-                        <a:rPr lang="en-US" sz="1600" kern="800" dirty="0">
+                        <a:rPr lang="en-US" sz="1400" kern="800" dirty="0">
                           <a:effectLst/>
                         </a:rPr>
                         <a:t>PLC Siemens S7-1500</a:t>
                       </a:r>
-                      <a:endParaRPr lang="en-GB" sz="1600" kern="800" dirty="0">
+                      <a:endParaRPr lang="en-GB" sz="1400" kern="800" dirty="0">
                         <a:effectLst/>
                         <a:latin typeface="Times" panose="02020603050405020304" pitchFamily="18" charset="0"/>
                         <a:ea typeface="Times New Roman" panose="02020603050405020304" pitchFamily="18" charset="0"/>
@@ -8539,12 +8773,12 @@
                         </a:spcAft>
                       </a:pPr>
                       <a:r>
-                        <a:rPr lang="en-US" sz="1600" kern="800" dirty="0">
+                        <a:rPr lang="en-US" sz="1400" kern="800" dirty="0">
                           <a:effectLst/>
                         </a:rPr>
                         <a:t>development</a:t>
                       </a:r>
-                      <a:endParaRPr lang="en-GB" sz="1600" kern="800" dirty="0">
+                      <a:endParaRPr lang="en-GB" sz="1400" kern="800" dirty="0">
                         <a:effectLst/>
                         <a:latin typeface="Times" panose="02020603050405020304" pitchFamily="18" charset="0"/>
                         <a:ea typeface="Times New Roman" panose="02020603050405020304" pitchFamily="18" charset="0"/>
@@ -8572,12 +8806,12 @@
                         </a:spcAft>
                       </a:pPr>
                       <a:r>
-                        <a:rPr lang="en-US" sz="1600" kern="800">
+                        <a:rPr lang="en-US" sz="1400" kern="800" dirty="0">
                           <a:effectLst/>
                         </a:rPr>
                         <a:t> </a:t>
                       </a:r>
-                      <a:endParaRPr lang="en-GB" sz="1600" kern="800">
+                      <a:endParaRPr lang="en-GB" sz="1400" kern="800" dirty="0">
                         <a:effectLst/>
                         <a:latin typeface="Times" panose="02020603050405020304" pitchFamily="18" charset="0"/>
                         <a:ea typeface="Times New Roman" panose="02020603050405020304" pitchFamily="18" charset="0"/>
@@ -8598,12 +8832,12 @@
                         </a:spcAft>
                       </a:pPr>
                       <a:r>
-                        <a:rPr lang="en-US" sz="1600" kern="800" dirty="0">
+                        <a:rPr lang="en-US" sz="1400" kern="800" dirty="0">
                           <a:effectLst/>
                         </a:rPr>
                         <a:t>LabVIEW</a:t>
                       </a:r>
-                      <a:endParaRPr lang="en-GB" sz="1600" kern="800" dirty="0">
+                      <a:endParaRPr lang="en-GB" sz="1400" kern="800" dirty="0">
                         <a:effectLst/>
                         <a:latin typeface="Times" panose="02020603050405020304" pitchFamily="18" charset="0"/>
                         <a:ea typeface="Times New Roman" panose="02020603050405020304" pitchFamily="18" charset="0"/>
@@ -8624,12 +8858,12 @@
                         </a:spcAft>
                       </a:pPr>
                       <a:r>
-                        <a:rPr lang="en-US" sz="1600" kern="800">
+                        <a:rPr lang="en-US" sz="1400" kern="800">
                           <a:effectLst/>
                         </a:rPr>
                         <a:t>development</a:t>
                       </a:r>
-                      <a:endParaRPr lang="en-GB" sz="1600" kern="800">
+                      <a:endParaRPr lang="en-GB" sz="1400" kern="800">
                         <a:effectLst/>
                         <a:latin typeface="Times" panose="02020603050405020304" pitchFamily="18" charset="0"/>
                         <a:ea typeface="Times New Roman" panose="02020603050405020304" pitchFamily="18" charset="0"/>
@@ -8657,12 +8891,12 @@
                         </a:spcAft>
                       </a:pPr>
                       <a:r>
-                        <a:rPr lang="en-US" sz="1600" kern="800">
+                        <a:rPr lang="en-US" sz="1400" kern="800" dirty="0">
                           <a:effectLst/>
                         </a:rPr>
                         <a:t>ESS</a:t>
                       </a:r>
-                      <a:endParaRPr lang="en-GB" sz="1600" kern="800">
+                      <a:endParaRPr lang="en-GB" sz="1400" kern="800" dirty="0">
                         <a:effectLst/>
                         <a:latin typeface="Times" panose="02020603050405020304" pitchFamily="18" charset="0"/>
                         <a:ea typeface="Times New Roman" panose="02020603050405020304" pitchFamily="18" charset="0"/>
@@ -8683,12 +8917,12 @@
                         </a:spcAft>
                       </a:pPr>
                       <a:r>
-                        <a:rPr lang="en-US" sz="1600" kern="800" dirty="0">
+                        <a:rPr lang="en-US" sz="1400" kern="800" dirty="0">
                           <a:effectLst/>
                         </a:rPr>
                         <a:t>PLC Siemens S7-1500F</a:t>
                       </a:r>
-                      <a:endParaRPr lang="en-GB" sz="1600" kern="800" dirty="0">
+                      <a:endParaRPr lang="en-GB" sz="1400" kern="800" dirty="0">
                         <a:effectLst/>
                         <a:latin typeface="Times" panose="02020603050405020304" pitchFamily="18" charset="0"/>
                         <a:ea typeface="Times New Roman" panose="02020603050405020304" pitchFamily="18" charset="0"/>
@@ -8709,7 +8943,7 @@
                         </a:spcAft>
                       </a:pPr>
                       <a:r>
-                        <a:rPr lang="en-US" sz="1600" b="1" kern="800" dirty="0">
+                        <a:rPr lang="en-US" sz="1400" b="1" kern="800" dirty="0">
                           <a:solidFill>
                             <a:srgbClr val="92D050"/>
                           </a:solidFill>
@@ -8717,7 +8951,7 @@
                         </a:rPr>
                         <a:t>production</a:t>
                       </a:r>
-                      <a:endParaRPr lang="en-GB" sz="1600" b="1" kern="800" dirty="0">
+                      <a:endParaRPr lang="en-GB" sz="1400" b="1" kern="800" dirty="0">
                         <a:solidFill>
                           <a:srgbClr val="92D050"/>
                         </a:solidFill>
@@ -8748,12 +8982,12 @@
                         </a:spcAft>
                       </a:pPr>
                       <a:r>
-                        <a:rPr lang="en-US" sz="1600" kern="800">
+                        <a:rPr lang="en-US" sz="1400" kern="800">
                           <a:effectLst/>
                         </a:rPr>
                         <a:t> </a:t>
                       </a:r>
-                      <a:endParaRPr lang="en-GB" sz="1600" kern="800">
+                      <a:endParaRPr lang="en-GB" sz="1400" kern="800">
                         <a:effectLst/>
                         <a:latin typeface="Times" panose="02020603050405020304" pitchFamily="18" charset="0"/>
                         <a:ea typeface="Times New Roman" panose="02020603050405020304" pitchFamily="18" charset="0"/>
@@ -8774,12 +9008,12 @@
                         </a:spcAft>
                       </a:pPr>
                       <a:r>
-                        <a:rPr lang="en-US" sz="1600" kern="800" dirty="0">
+                        <a:rPr lang="en-US" sz="1400" kern="800" dirty="0">
                           <a:effectLst/>
                         </a:rPr>
                         <a:t>ABB Power SCADA</a:t>
                       </a:r>
-                      <a:endParaRPr lang="en-GB" sz="1600" kern="800" dirty="0">
+                      <a:endParaRPr lang="en-GB" sz="1400" kern="800" dirty="0">
                         <a:effectLst/>
                         <a:latin typeface="Times" panose="02020603050405020304" pitchFamily="18" charset="0"/>
                         <a:ea typeface="Times New Roman" panose="02020603050405020304" pitchFamily="18" charset="0"/>
@@ -8800,12 +9034,12 @@
                         </a:spcAft>
                       </a:pPr>
                       <a:r>
-                        <a:rPr lang="en-US" sz="1600" kern="800">
+                        <a:rPr lang="en-US" sz="1400" kern="800">
                           <a:effectLst/>
                         </a:rPr>
                         <a:t>near production</a:t>
                       </a:r>
-                      <a:endParaRPr lang="en-GB" sz="1600" kern="800">
+                      <a:endParaRPr lang="en-GB" sz="1400" kern="800">
                         <a:effectLst/>
                         <a:latin typeface="Times" panose="02020603050405020304" pitchFamily="18" charset="0"/>
                         <a:ea typeface="Times New Roman" panose="02020603050405020304" pitchFamily="18" charset="0"/>
@@ -8833,12 +9067,12 @@
                         </a:spcAft>
                       </a:pPr>
                       <a:r>
-                        <a:rPr lang="en-US" sz="1600" kern="800">
+                        <a:rPr lang="en-US" sz="1400" kern="800" dirty="0">
                           <a:effectLst/>
                         </a:rPr>
                         <a:t> </a:t>
                       </a:r>
-                      <a:endParaRPr lang="en-GB" sz="1600" kern="800">
+                      <a:endParaRPr lang="en-GB" sz="1400" kern="800" dirty="0">
                         <a:effectLst/>
                         <a:latin typeface="Times" panose="02020603050405020304" pitchFamily="18" charset="0"/>
                         <a:ea typeface="Times New Roman" panose="02020603050405020304" pitchFamily="18" charset="0"/>
@@ -8859,12 +9093,12 @@
                         </a:spcAft>
                       </a:pPr>
                       <a:r>
-                        <a:rPr lang="en-US" sz="1600" kern="800" dirty="0">
+                        <a:rPr lang="en-US" sz="1400" kern="800" dirty="0">
                           <a:effectLst/>
                         </a:rPr>
                         <a:t>Siemens DESIGO</a:t>
                       </a:r>
-                      <a:endParaRPr lang="en-GB" sz="1600" kern="800" dirty="0">
+                      <a:endParaRPr lang="en-GB" sz="1400" kern="800" dirty="0">
                         <a:effectLst/>
                         <a:latin typeface="Times" panose="02020603050405020304" pitchFamily="18" charset="0"/>
                         <a:ea typeface="Times New Roman" panose="02020603050405020304" pitchFamily="18" charset="0"/>
@@ -8885,12 +9119,12 @@
                         </a:spcAft>
                       </a:pPr>
                       <a:r>
-                        <a:rPr lang="en-US" sz="1600" kern="800">
+                        <a:rPr lang="en-US" sz="1400" kern="800">
                           <a:effectLst/>
                         </a:rPr>
                         <a:t>development</a:t>
                       </a:r>
-                      <a:endParaRPr lang="en-GB" sz="1600" kern="800">
+                      <a:endParaRPr lang="en-GB" sz="1400" kern="800">
                         <a:effectLst/>
                         <a:latin typeface="Times" panose="02020603050405020304" pitchFamily="18" charset="0"/>
                         <a:ea typeface="Times New Roman" panose="02020603050405020304" pitchFamily="18" charset="0"/>
@@ -8918,12 +9152,12 @@
                         </a:spcAft>
                       </a:pPr>
                       <a:r>
-                        <a:rPr lang="en-US" sz="1600" kern="800">
+                        <a:rPr lang="en-US" sz="1400" kern="800">
                           <a:effectLst/>
                         </a:rPr>
                         <a:t>Fermilab</a:t>
                       </a:r>
-                      <a:endParaRPr lang="en-GB" sz="1600" kern="800">
+                      <a:endParaRPr lang="en-GB" sz="1400" kern="800">
                         <a:effectLst/>
                         <a:latin typeface="Times" panose="02020603050405020304" pitchFamily="18" charset="0"/>
                         <a:ea typeface="Times New Roman" panose="02020603050405020304" pitchFamily="18" charset="0"/>
@@ -8944,24 +9178,24 @@
                         </a:spcAft>
                       </a:pPr>
                       <a:r>
-                        <a:rPr lang="en-US" sz="1600" kern="800" dirty="0" err="1">
+                        <a:rPr lang="en-US" sz="1400" kern="800" dirty="0" err="1">
                           <a:effectLst/>
                         </a:rPr>
                         <a:t>Kepware</a:t>
                       </a:r>
                       <a:r>
-                        <a:rPr lang="en-US" sz="1600" kern="800" dirty="0">
+                        <a:rPr lang="en-US" sz="1400" kern="800" dirty="0">
                           <a:effectLst/>
                         </a:rPr>
                         <a:t> </a:t>
                       </a:r>
                       <a:r>
-                        <a:rPr lang="en-US" sz="1600" kern="800" dirty="0" err="1">
+                        <a:rPr lang="en-US" sz="1400" kern="800" dirty="0" err="1">
                           <a:effectLst/>
                         </a:rPr>
                         <a:t>KEPServerEX</a:t>
                       </a:r>
-                      <a:endParaRPr lang="en-GB" sz="1600" kern="800" dirty="0">
+                      <a:endParaRPr lang="en-GB" sz="1400" kern="800" dirty="0">
                         <a:effectLst/>
                         <a:latin typeface="Times" panose="02020603050405020304" pitchFamily="18" charset="0"/>
                         <a:ea typeface="Times New Roman" panose="02020603050405020304" pitchFamily="18" charset="0"/>
@@ -8982,12 +9216,12 @@
                         </a:spcAft>
                       </a:pPr>
                       <a:r>
-                        <a:rPr lang="en-US" sz="1600" kern="800">
+                        <a:rPr lang="en-US" sz="1400" kern="800">
                           <a:effectLst/>
                         </a:rPr>
                         <a:t>testing</a:t>
                       </a:r>
-                      <a:endParaRPr lang="en-GB" sz="1600" kern="800">
+                      <a:endParaRPr lang="en-GB" sz="1400" kern="800">
                         <a:effectLst/>
                         <a:latin typeface="Times" panose="02020603050405020304" pitchFamily="18" charset="0"/>
                         <a:ea typeface="Times New Roman" panose="02020603050405020304" pitchFamily="18" charset="0"/>
@@ -9015,12 +9249,12 @@
                         </a:spcAft>
                       </a:pPr>
                       <a:r>
-                        <a:rPr lang="en-US" sz="1600" kern="800">
+                        <a:rPr lang="en-US" sz="1400" kern="800">
                           <a:effectLst/>
                         </a:rPr>
                         <a:t> </a:t>
                       </a:r>
-                      <a:endParaRPr lang="en-GB" sz="1600" kern="800">
+                      <a:endParaRPr lang="en-GB" sz="1400" kern="800">
                         <a:effectLst/>
                         <a:latin typeface="Times" panose="02020603050405020304" pitchFamily="18" charset="0"/>
                         <a:ea typeface="Times New Roman" panose="02020603050405020304" pitchFamily="18" charset="0"/>
@@ -9041,12 +9275,12 @@
                         </a:spcAft>
                       </a:pPr>
                       <a:r>
-                        <a:rPr lang="en-US" sz="1600" kern="800" dirty="0">
+                        <a:rPr lang="en-US" sz="1400" kern="800" dirty="0">
                           <a:effectLst/>
                         </a:rPr>
                         <a:t>PLC Siemens S7-400</a:t>
                       </a:r>
-                      <a:endParaRPr lang="en-GB" sz="1600" kern="800" dirty="0">
+                      <a:endParaRPr lang="en-GB" sz="1400" kern="800" dirty="0">
                         <a:effectLst/>
                         <a:latin typeface="Times" panose="02020603050405020304" pitchFamily="18" charset="0"/>
                         <a:ea typeface="Times New Roman" panose="02020603050405020304" pitchFamily="18" charset="0"/>
@@ -9067,12 +9301,12 @@
                         </a:spcAft>
                       </a:pPr>
                       <a:r>
-                        <a:rPr lang="en-US" sz="1600" kern="800">
+                        <a:rPr lang="en-US" sz="1400" kern="800">
                           <a:effectLst/>
                         </a:rPr>
                         <a:t>development</a:t>
                       </a:r>
-                      <a:endParaRPr lang="en-GB" sz="1600" kern="800">
+                      <a:endParaRPr lang="en-GB" sz="1400" kern="800">
                         <a:effectLst/>
                         <a:latin typeface="Times" panose="02020603050405020304" pitchFamily="18" charset="0"/>
                         <a:ea typeface="Times New Roman" panose="02020603050405020304" pitchFamily="18" charset="0"/>
@@ -9100,12 +9334,12 @@
                         </a:spcAft>
                       </a:pPr>
                       <a:r>
-                        <a:rPr lang="en-US" sz="1600" kern="800">
+                        <a:rPr lang="en-US" sz="1400" kern="800">
                           <a:effectLst/>
                         </a:rPr>
                         <a:t>IPR</a:t>
                       </a:r>
-                      <a:endParaRPr lang="en-GB" sz="1600" kern="800">
+                      <a:endParaRPr lang="en-GB" sz="1400" kern="800">
                         <a:effectLst/>
                         <a:latin typeface="Times" panose="02020603050405020304" pitchFamily="18" charset="0"/>
                         <a:ea typeface="Times New Roman" panose="02020603050405020304" pitchFamily="18" charset="0"/>
@@ -9126,12 +9360,12 @@
                         </a:spcAft>
                       </a:pPr>
                       <a:r>
-                        <a:rPr lang="en-US" sz="1600" kern="800" dirty="0">
+                        <a:rPr lang="en-US" sz="1400" kern="800" dirty="0">
                           <a:effectLst/>
                         </a:rPr>
                         <a:t>PLC Siemens S7-1500</a:t>
                       </a:r>
-                      <a:endParaRPr lang="en-GB" sz="1600" kern="800" dirty="0">
+                      <a:endParaRPr lang="en-GB" sz="1400" kern="800" dirty="0">
                         <a:effectLst/>
                         <a:latin typeface="Times" panose="02020603050405020304" pitchFamily="18" charset="0"/>
                         <a:ea typeface="Times New Roman" panose="02020603050405020304" pitchFamily="18" charset="0"/>
@@ -9152,12 +9386,12 @@
                         </a:spcAft>
                       </a:pPr>
                       <a:r>
-                        <a:rPr lang="en-US" sz="1600" kern="800">
+                        <a:rPr lang="en-US" sz="1400" kern="800" dirty="0">
                           <a:effectLst/>
                         </a:rPr>
                         <a:t>testing</a:t>
                       </a:r>
-                      <a:endParaRPr lang="en-GB" sz="1600" kern="800">
+                      <a:endParaRPr lang="en-GB" sz="1400" kern="800" dirty="0">
                         <a:effectLst/>
                         <a:latin typeface="Times" panose="02020603050405020304" pitchFamily="18" charset="0"/>
                         <a:ea typeface="Times New Roman" panose="02020603050405020304" pitchFamily="18" charset="0"/>
@@ -9185,12 +9419,12 @@
                         </a:spcAft>
                       </a:pPr>
                       <a:r>
-                        <a:rPr lang="en-US" sz="1600" kern="800">
+                        <a:rPr lang="en-US" sz="1400" kern="800">
                           <a:effectLst/>
                         </a:rPr>
                         <a:t>ITER</a:t>
                       </a:r>
-                      <a:endParaRPr lang="en-GB" sz="1600" kern="800">
+                      <a:endParaRPr lang="en-GB" sz="1400" kern="800">
                         <a:effectLst/>
                         <a:latin typeface="Times" panose="02020603050405020304" pitchFamily="18" charset="0"/>
                         <a:ea typeface="Times New Roman" panose="02020603050405020304" pitchFamily="18" charset="0"/>
@@ -9211,12 +9445,12 @@
                         </a:spcAft>
                       </a:pPr>
                       <a:r>
-                        <a:rPr lang="en-US" sz="1600" kern="800" dirty="0">
+                        <a:rPr lang="en-US" sz="1400" kern="800" dirty="0">
                           <a:effectLst/>
                         </a:rPr>
                         <a:t>PLC Siemens S7-1500</a:t>
                       </a:r>
-                      <a:endParaRPr lang="en-GB" sz="1600" kern="800" dirty="0">
+                      <a:endParaRPr lang="en-GB" sz="1400" kern="800" dirty="0">
                         <a:effectLst/>
                         <a:latin typeface="Times" panose="02020603050405020304" pitchFamily="18" charset="0"/>
                         <a:ea typeface="Times New Roman" panose="02020603050405020304" pitchFamily="18" charset="0"/>
@@ -9237,7 +9471,7 @@
                         </a:spcAft>
                       </a:pPr>
                       <a:r>
-                        <a:rPr lang="en-US" sz="1600" b="1" kern="800" dirty="0">
+                        <a:rPr lang="en-US" sz="1400" b="1" kern="800" dirty="0">
                           <a:solidFill>
                             <a:srgbClr val="92D050"/>
                           </a:solidFill>
@@ -9245,7 +9479,7 @@
                         </a:rPr>
                         <a:t>production</a:t>
                       </a:r>
-                      <a:endParaRPr lang="en-GB" sz="1600" b="1" kern="800" dirty="0">
+                      <a:endParaRPr lang="en-GB" sz="1400" b="1" kern="800" dirty="0">
                         <a:solidFill>
                           <a:srgbClr val="92D050"/>
                         </a:solidFill>
@@ -9276,12 +9510,12 @@
                         </a:spcAft>
                       </a:pPr>
                       <a:r>
-                        <a:rPr lang="en-US" sz="1600" kern="800">
+                        <a:rPr lang="en-US" sz="1400" kern="800">
                           <a:effectLst/>
                         </a:rPr>
                         <a:t> </a:t>
                       </a:r>
-                      <a:endParaRPr lang="en-GB" sz="1600" kern="800">
+                      <a:endParaRPr lang="en-GB" sz="1400" kern="800">
                         <a:effectLst/>
                         <a:latin typeface="Times" panose="02020603050405020304" pitchFamily="18" charset="0"/>
                         <a:ea typeface="Times New Roman" panose="02020603050405020304" pitchFamily="18" charset="0"/>
@@ -9302,24 +9536,24 @@
                         </a:spcAft>
                       </a:pPr>
                       <a:r>
-                        <a:rPr lang="en-US" sz="1600" kern="800" dirty="0">
+                        <a:rPr lang="en-US" sz="1400" kern="800" dirty="0">
                           <a:effectLst/>
                         </a:rPr>
                         <a:t>Siemens </a:t>
                       </a:r>
                       <a:r>
-                        <a:rPr lang="en-US" sz="1600" kern="800" dirty="0" err="1">
+                        <a:rPr lang="en-US" sz="1400" kern="800" dirty="0" err="1">
                           <a:effectLst/>
                         </a:rPr>
                         <a:t>WinCC</a:t>
                       </a:r>
                       <a:r>
-                        <a:rPr lang="en-US" sz="1600" kern="800" dirty="0">
+                        <a:rPr lang="en-US" sz="1400" kern="800" dirty="0">
                           <a:effectLst/>
                         </a:rPr>
                         <a:t> OA</a:t>
                       </a:r>
-                      <a:endParaRPr lang="en-GB" sz="1600" kern="800" dirty="0">
+                      <a:endParaRPr lang="en-GB" sz="1400" kern="800" dirty="0">
                         <a:effectLst/>
                         <a:latin typeface="Times" panose="02020603050405020304" pitchFamily="18" charset="0"/>
                         <a:ea typeface="Times New Roman" panose="02020603050405020304" pitchFamily="18" charset="0"/>
@@ -9340,7 +9574,7 @@
                         </a:spcAft>
                       </a:pPr>
                       <a:r>
-                        <a:rPr lang="en-US" sz="1600" b="1" kern="800" dirty="0">
+                        <a:rPr lang="en-US" sz="1400" b="1" kern="800" dirty="0">
                           <a:solidFill>
                             <a:srgbClr val="92D050"/>
                           </a:solidFill>
@@ -9348,7 +9582,7 @@
                         </a:rPr>
                         <a:t>production</a:t>
                       </a:r>
-                      <a:endParaRPr lang="en-GB" sz="1600" b="1" kern="800" dirty="0">
+                      <a:endParaRPr lang="en-GB" sz="1400" b="1" kern="800" dirty="0">
                         <a:solidFill>
                           <a:srgbClr val="92D050"/>
                         </a:solidFill>
@@ -9379,12 +9613,12 @@
                         </a:spcAft>
                       </a:pPr>
                       <a:r>
-                        <a:rPr lang="en-US" sz="1600" kern="800">
+                        <a:rPr lang="en-US" sz="1400" kern="800">
                           <a:effectLst/>
                         </a:rPr>
                         <a:t> </a:t>
                       </a:r>
-                      <a:endParaRPr lang="en-GB" sz="1600" kern="800">
+                      <a:endParaRPr lang="en-GB" sz="1400" kern="800">
                         <a:effectLst/>
                         <a:latin typeface="Times" panose="02020603050405020304" pitchFamily="18" charset="0"/>
                         <a:ea typeface="Times New Roman" panose="02020603050405020304" pitchFamily="18" charset="0"/>
@@ -9405,12 +9639,12 @@
                         </a:spcAft>
                       </a:pPr>
                       <a:r>
-                        <a:rPr lang="en-US" sz="1600" kern="800" dirty="0" err="1">
+                        <a:rPr lang="en-US" sz="1400" kern="800" dirty="0" err="1">
                           <a:effectLst/>
                         </a:rPr>
                         <a:t>PCVue</a:t>
                       </a:r>
-                      <a:endParaRPr lang="en-GB" sz="1600" kern="800" dirty="0">
+                      <a:endParaRPr lang="en-GB" sz="1400" kern="800" dirty="0">
                         <a:effectLst/>
                         <a:latin typeface="Times" panose="02020603050405020304" pitchFamily="18" charset="0"/>
                         <a:ea typeface="Times New Roman" panose="02020603050405020304" pitchFamily="18" charset="0"/>
@@ -9431,7 +9665,7 @@
                         </a:spcAft>
                       </a:pPr>
                       <a:r>
-                        <a:rPr lang="en-US" sz="1600" b="1" kern="800" dirty="0">
+                        <a:rPr lang="en-US" sz="1400" b="1" kern="800" dirty="0">
                           <a:solidFill>
                             <a:srgbClr val="92D050"/>
                           </a:solidFill>
@@ -9439,7 +9673,7 @@
                         </a:rPr>
                         <a:t>production</a:t>
                       </a:r>
-                      <a:endParaRPr lang="en-GB" sz="1600" b="1" kern="800" dirty="0">
+                      <a:endParaRPr lang="en-GB" sz="1400" b="1" kern="800" dirty="0">
                         <a:solidFill>
                           <a:srgbClr val="92D050"/>
                         </a:solidFill>
@@ -9470,12 +9704,12 @@
                         </a:spcAft>
                       </a:pPr>
                       <a:r>
-                        <a:rPr lang="en-US" sz="1600" kern="800" dirty="0">
+                        <a:rPr lang="en-US" sz="1400" kern="800" dirty="0">
                           <a:effectLst/>
                         </a:rPr>
                         <a:t>KATRIN @KIT</a:t>
                       </a:r>
-                      <a:endParaRPr lang="en-GB" sz="1600" kern="800" dirty="0">
+                      <a:endParaRPr lang="en-GB" sz="1400" kern="800" dirty="0">
                         <a:effectLst/>
                         <a:latin typeface="Times" panose="02020603050405020304" pitchFamily="18" charset="0"/>
                         <a:ea typeface="Times New Roman" panose="02020603050405020304" pitchFamily="18" charset="0"/>
@@ -9496,12 +9730,12 @@
                         </a:spcAft>
                       </a:pPr>
                       <a:r>
-                        <a:rPr lang="en-US" sz="1600" kern="800" dirty="0">
+                        <a:rPr lang="en-US" sz="1400" kern="800" dirty="0">
                           <a:effectLst/>
                         </a:rPr>
                         <a:t>LabVIEW</a:t>
                       </a:r>
-                      <a:endParaRPr lang="en-GB" sz="1600" kern="800" dirty="0">
+                      <a:endParaRPr lang="en-GB" sz="1400" kern="800" dirty="0">
                         <a:effectLst/>
                         <a:latin typeface="Times" panose="02020603050405020304" pitchFamily="18" charset="0"/>
                         <a:ea typeface="Times New Roman" panose="02020603050405020304" pitchFamily="18" charset="0"/>
@@ -9522,12 +9756,12 @@
                         </a:spcAft>
                       </a:pPr>
                       <a:r>
-                        <a:rPr lang="en-US" sz="1600" kern="800" dirty="0">
+                        <a:rPr lang="en-US" sz="1400" kern="800" dirty="0">
                           <a:effectLst/>
                         </a:rPr>
                         <a:t>prototyping</a:t>
                       </a:r>
-                      <a:endParaRPr lang="en-GB" sz="1600" kern="800" dirty="0">
+                      <a:endParaRPr lang="en-GB" sz="1400" kern="800" dirty="0">
                         <a:effectLst/>
                         <a:latin typeface="Times" panose="02020603050405020304" pitchFamily="18" charset="0"/>
                         <a:ea typeface="Times New Roman" panose="02020603050405020304" pitchFamily="18" charset="0"/>
@@ -9555,12 +9789,12 @@
                         </a:spcAft>
                       </a:pPr>
                       <a:r>
-                        <a:rPr lang="en-US" sz="1600" kern="800">
+                        <a:rPr lang="en-US" sz="1400" kern="800" dirty="0">
                           <a:effectLst/>
                         </a:rPr>
                         <a:t>PSI</a:t>
                       </a:r>
-                      <a:endParaRPr lang="en-GB" sz="1600" kern="800">
+                      <a:endParaRPr lang="en-GB" sz="1400" kern="800" dirty="0">
                         <a:effectLst/>
                         <a:latin typeface="Times" panose="02020603050405020304" pitchFamily="18" charset="0"/>
                         <a:ea typeface="Times New Roman" panose="02020603050405020304" pitchFamily="18" charset="0"/>
@@ -9581,12 +9815,12 @@
                         </a:spcAft>
                       </a:pPr>
                       <a:r>
-                        <a:rPr lang="en-US" sz="1600" kern="800" dirty="0">
+                        <a:rPr lang="en-US" sz="1400" kern="800" dirty="0">
                           <a:effectLst/>
                         </a:rPr>
                         <a:t>PLC Siemens S7-1500</a:t>
                       </a:r>
-                      <a:endParaRPr lang="en-GB" sz="1600" kern="800" dirty="0">
+                      <a:endParaRPr lang="en-GB" sz="1400" kern="800" dirty="0">
                         <a:effectLst/>
                         <a:latin typeface="Times" panose="02020603050405020304" pitchFamily="18" charset="0"/>
                         <a:ea typeface="Times New Roman" panose="02020603050405020304" pitchFamily="18" charset="0"/>
@@ -9607,12 +9841,15 @@
                         </a:spcAft>
                       </a:pPr>
                       <a:r>
-                        <a:rPr lang="en-US" sz="1600" kern="800" dirty="0">
+                        <a:rPr lang="en-US" sz="1400" b="1" kern="800" dirty="0">
+                          <a:solidFill>
+                            <a:srgbClr val="92D050"/>
+                          </a:solidFill>
                           <a:effectLst/>
                         </a:rPr>
-                        <a:t>development</a:t>
+                        <a:t>production</a:t>
                       </a:r>
-                      <a:endParaRPr lang="en-GB" sz="1600" kern="800" dirty="0">
+                      <a:endParaRPr lang="en-GB" sz="1400" kern="800" dirty="0">
                         <a:effectLst/>
                         <a:latin typeface="Times" panose="02020603050405020304" pitchFamily="18" charset="0"/>
                         <a:ea typeface="Times New Roman" panose="02020603050405020304" pitchFamily="18" charset="0"/>
@@ -9639,19 +9876,7 @@
                           <a:spcPts val="0"/>
                         </a:spcAft>
                       </a:pPr>
-                      <a:r>
-                        <a:rPr lang="en-US" sz="1600" kern="800" dirty="0">
-                          <a:effectLst/>
-                        </a:rPr>
-                        <a:t>Varian </a:t>
-                      </a:r>
-                      <a:r>
-                        <a:rPr lang="en-US" sz="1600" kern="800" dirty="0" err="1">
-                          <a:effectLst/>
-                        </a:rPr>
-                        <a:t>ProBeam</a:t>
-                      </a:r>
-                      <a:endParaRPr lang="en-GB" sz="1600" kern="800" dirty="0">
+                      <a:endParaRPr lang="en-GB" sz="1400" kern="800" dirty="0">
                         <a:effectLst/>
                         <a:latin typeface="Times" panose="02020603050405020304" pitchFamily="18" charset="0"/>
                         <a:ea typeface="Times New Roman" panose="02020603050405020304" pitchFamily="18" charset="0"/>
@@ -9672,12 +9897,12 @@
                         </a:spcAft>
                       </a:pPr>
                       <a:r>
-                        <a:rPr lang="en-US" sz="1600" kern="800" dirty="0">
+                        <a:rPr lang="en-US" sz="1400" kern="800" dirty="0">
                           <a:effectLst/>
                         </a:rPr>
-                        <a:t>PLC Siemens S7</a:t>
+                        <a:t>PLC WAGO 750-8212</a:t>
                       </a:r>
-                      <a:endParaRPr lang="en-GB" sz="1600" kern="800" dirty="0">
+                      <a:endParaRPr lang="en-GB" sz="1400" kern="800" dirty="0">
                         <a:effectLst/>
                         <a:latin typeface="Times" panose="02020603050405020304" pitchFamily="18" charset="0"/>
                         <a:ea typeface="Times New Roman" panose="02020603050405020304" pitchFamily="18" charset="0"/>
@@ -9698,7 +9923,7 @@
                         </a:spcAft>
                       </a:pPr>
                       <a:r>
-                        <a:rPr lang="en-US" sz="1600" b="1" kern="800" dirty="0">
+                        <a:rPr lang="en-US" sz="1400" b="1" kern="800" dirty="0">
                           <a:solidFill>
                             <a:srgbClr val="92D050"/>
                           </a:solidFill>
@@ -9706,7 +9931,278 @@
                         </a:rPr>
                         <a:t>production</a:t>
                       </a:r>
-                      <a:endParaRPr lang="en-GB" sz="1600" b="1" kern="800" dirty="0">
+                      <a:endParaRPr lang="en-GB" sz="1400" b="1" kern="800" dirty="0">
+                        <a:solidFill>
+                          <a:srgbClr val="92D050"/>
+                        </a:solidFill>
+                        <a:effectLst/>
+                        <a:latin typeface="Times" panose="02020603050405020304" pitchFamily="18" charset="0"/>
+                        <a:ea typeface="Times New Roman" panose="02020603050405020304" pitchFamily="18" charset="0"/>
+                        <a:cs typeface="Times New Roman" panose="02020603050405020304" pitchFamily="18" charset="0"/>
+                      </a:endParaRPr>
+                    </a:p>
+                  </a:txBody>
+                  <a:tcPr marL="56922" marR="56922" marT="0" marB="0"/>
+                </a:tc>
+                <a:extLst>
+                  <a:ext uri="{0D108BD9-81ED-4DB2-BD59-A6C34878D82A}">
+                    <a16:rowId xmlns:a16="http://schemas.microsoft.com/office/drawing/2014/main" val="3893462021"/>
+                  </a:ext>
+                </a:extLst>
+              </a:tr>
+              <a:tr h="199018">
+                <a:tc>
+                  <a:txBody>
+                    <a:bodyPr/>
+                    <a:lstStyle/>
+                    <a:p>
+                      <a:pPr indent="118745" algn="l">
+                        <a:spcAft>
+                          <a:spcPts val="0"/>
+                        </a:spcAft>
+                      </a:pPr>
+                      <a:endParaRPr lang="en-GB" sz="1400" kern="800" dirty="0">
+                        <a:effectLst/>
+                        <a:latin typeface="Times" panose="02020603050405020304" pitchFamily="18" charset="0"/>
+                        <a:ea typeface="Times New Roman" panose="02020603050405020304" pitchFamily="18" charset="0"/>
+                        <a:cs typeface="Times New Roman" panose="02020603050405020304" pitchFamily="18" charset="0"/>
+                      </a:endParaRPr>
+                    </a:p>
+                  </a:txBody>
+                  <a:tcPr marL="56922" marR="56922" marT="0" marB="0"/>
+                </a:tc>
+                <a:tc>
+                  <a:txBody>
+                    <a:bodyPr/>
+                    <a:lstStyle/>
+                    <a:p>
+                      <a:pPr indent="118745" algn="l">
+                        <a:spcAft>
+                          <a:spcPts val="0"/>
+                        </a:spcAft>
+                      </a:pPr>
+                      <a:r>
+                        <a:rPr lang="en-US" sz="1400" kern="800" dirty="0">
+                          <a:effectLst/>
+                        </a:rPr>
+                        <a:t>PLC Beckhoff</a:t>
+                      </a:r>
+                      <a:endParaRPr lang="en-GB" sz="1400" kern="800" dirty="0">
+                        <a:effectLst/>
+                        <a:latin typeface="Times" panose="02020603050405020304" pitchFamily="18" charset="0"/>
+                        <a:ea typeface="Times New Roman" panose="02020603050405020304" pitchFamily="18" charset="0"/>
+                        <a:cs typeface="Times New Roman" panose="02020603050405020304" pitchFamily="18" charset="0"/>
+                      </a:endParaRPr>
+                    </a:p>
+                  </a:txBody>
+                  <a:tcPr marL="56922" marR="56922" marT="0" marB="0"/>
+                </a:tc>
+                <a:tc>
+                  <a:txBody>
+                    <a:bodyPr/>
+                    <a:lstStyle/>
+                    <a:p>
+                      <a:pPr indent="118745" algn="l">
+                        <a:spcAft>
+                          <a:spcPts val="0"/>
+                        </a:spcAft>
+                      </a:pPr>
+                      <a:r>
+                        <a:rPr lang="en-US" sz="1400" b="1" kern="800" dirty="0">
+                          <a:solidFill>
+                            <a:srgbClr val="92D050"/>
+                          </a:solidFill>
+                          <a:effectLst/>
+                        </a:rPr>
+                        <a:t>production</a:t>
+                      </a:r>
+                      <a:endParaRPr lang="en-GB" sz="1400" b="1" kern="800" dirty="0">
+                        <a:solidFill>
+                          <a:srgbClr val="92D050"/>
+                        </a:solidFill>
+                        <a:effectLst/>
+                        <a:latin typeface="Times" panose="02020603050405020304" pitchFamily="18" charset="0"/>
+                        <a:ea typeface="Times New Roman" panose="02020603050405020304" pitchFamily="18" charset="0"/>
+                        <a:cs typeface="Times New Roman" panose="02020603050405020304" pitchFamily="18" charset="0"/>
+                      </a:endParaRPr>
+                    </a:p>
+                  </a:txBody>
+                  <a:tcPr marL="56922" marR="56922" marT="0" marB="0"/>
+                </a:tc>
+                <a:extLst>
+                  <a:ext uri="{0D108BD9-81ED-4DB2-BD59-A6C34878D82A}">
+                    <a16:rowId xmlns:a16="http://schemas.microsoft.com/office/drawing/2014/main" val="1192241980"/>
+                  </a:ext>
+                </a:extLst>
+              </a:tr>
+              <a:tr h="199018">
+                <a:tc>
+                  <a:txBody>
+                    <a:bodyPr/>
+                    <a:lstStyle/>
+                    <a:p>
+                      <a:pPr indent="118745" algn="l">
+                        <a:spcAft>
+                          <a:spcPts val="0"/>
+                        </a:spcAft>
+                      </a:pPr>
+                      <a:endParaRPr lang="en-GB" sz="1400" kern="800" dirty="0">
+                        <a:effectLst/>
+                        <a:latin typeface="Times" panose="02020603050405020304" pitchFamily="18" charset="0"/>
+                        <a:ea typeface="Times New Roman" panose="02020603050405020304" pitchFamily="18" charset="0"/>
+                        <a:cs typeface="Times New Roman" panose="02020603050405020304" pitchFamily="18" charset="0"/>
+                      </a:endParaRPr>
+                    </a:p>
+                  </a:txBody>
+                  <a:tcPr marL="56922" marR="56922" marT="0" marB="0"/>
+                </a:tc>
+                <a:tc>
+                  <a:txBody>
+                    <a:bodyPr/>
+                    <a:lstStyle/>
+                    <a:p>
+                      <a:pPr indent="118745" algn="l">
+                        <a:spcAft>
+                          <a:spcPts val="0"/>
+                        </a:spcAft>
+                      </a:pPr>
+                      <a:r>
+                        <a:rPr lang="en-US" sz="1400" kern="800" dirty="0">
+                          <a:effectLst/>
+                        </a:rPr>
+                        <a:t>open</a:t>
+                      </a:r>
+                      <a:r>
+                        <a:rPr lang="en-US" sz="1400" dirty="0"/>
+                        <a:t>62541 server on</a:t>
+                      </a:r>
+                      <a:r>
+                        <a:rPr lang="en-US" sz="1400" kern="800" dirty="0">
+                          <a:effectLst/>
+                        </a:rPr>
+                        <a:t> Red Pitaya</a:t>
+                      </a:r>
+                      <a:endParaRPr lang="en-GB" sz="1400" kern="800" dirty="0">
+                        <a:effectLst/>
+                        <a:latin typeface="Times" panose="02020603050405020304" pitchFamily="18" charset="0"/>
+                        <a:ea typeface="Times New Roman" panose="02020603050405020304" pitchFamily="18" charset="0"/>
+                        <a:cs typeface="Times New Roman" panose="02020603050405020304" pitchFamily="18" charset="0"/>
+                      </a:endParaRPr>
+                    </a:p>
+                  </a:txBody>
+                  <a:tcPr marL="56922" marR="56922" marT="0" marB="0"/>
+                </a:tc>
+                <a:tc>
+                  <a:txBody>
+                    <a:bodyPr/>
+                    <a:lstStyle/>
+                    <a:p>
+                      <a:pPr indent="118745" algn="l">
+                        <a:spcAft>
+                          <a:spcPts val="0"/>
+                        </a:spcAft>
+                      </a:pPr>
+                      <a:r>
+                        <a:rPr lang="en-US" sz="1400" kern="800" dirty="0">
+                          <a:effectLst/>
+                        </a:rPr>
+                        <a:t>near production</a:t>
+                      </a:r>
+                      <a:endParaRPr lang="en-GB" sz="1400" kern="800" dirty="0">
+                        <a:effectLst/>
+                        <a:latin typeface="Times" panose="02020603050405020304" pitchFamily="18" charset="0"/>
+                        <a:ea typeface="Times New Roman" panose="02020603050405020304" pitchFamily="18" charset="0"/>
+                        <a:cs typeface="Times New Roman" panose="02020603050405020304" pitchFamily="18" charset="0"/>
+                      </a:endParaRPr>
+                    </a:p>
+                  </a:txBody>
+                  <a:tcPr marL="56922" marR="56922" marT="0" marB="0"/>
+                </a:tc>
+                <a:extLst>
+                  <a:ext uri="{0D108BD9-81ED-4DB2-BD59-A6C34878D82A}">
+                    <a16:rowId xmlns:a16="http://schemas.microsoft.com/office/drawing/2014/main" val="3094588548"/>
+                  </a:ext>
+                </a:extLst>
+              </a:tr>
+              <a:tr h="199018">
+                <a:tc>
+                  <a:txBody>
+                    <a:bodyPr/>
+                    <a:lstStyle/>
+                    <a:p>
+                      <a:pPr indent="118745" algn="l">
+                        <a:spcAft>
+                          <a:spcPts val="0"/>
+                        </a:spcAft>
+                      </a:pPr>
+                      <a:r>
+                        <a:rPr lang="en-US" sz="1400" kern="800" dirty="0">
+                          <a:effectLst/>
+                        </a:rPr>
+                        <a:t>Varian </a:t>
+                      </a:r>
+                      <a:r>
+                        <a:rPr lang="en-US" sz="1400" kern="800" dirty="0" err="1">
+                          <a:effectLst/>
+                        </a:rPr>
+                        <a:t>ProBeam</a:t>
+                      </a:r>
+                      <a:endParaRPr lang="en-GB" sz="1400" kern="800" dirty="0">
+                        <a:effectLst/>
+                        <a:latin typeface="Times" panose="02020603050405020304" pitchFamily="18" charset="0"/>
+                        <a:ea typeface="Times New Roman" panose="02020603050405020304" pitchFamily="18" charset="0"/>
+                        <a:cs typeface="Times New Roman" panose="02020603050405020304" pitchFamily="18" charset="0"/>
+                      </a:endParaRPr>
+                    </a:p>
+                  </a:txBody>
+                  <a:tcPr marL="56922" marR="56922" marT="0" marB="0"/>
+                </a:tc>
+                <a:tc>
+                  <a:txBody>
+                    <a:bodyPr/>
+                    <a:lstStyle/>
+                    <a:p>
+                      <a:pPr indent="118745" algn="l">
+                        <a:spcAft>
+                          <a:spcPts val="0"/>
+                        </a:spcAft>
+                      </a:pPr>
+                      <a:r>
+                        <a:rPr lang="en-US" sz="1400" kern="800" dirty="0">
+                          <a:effectLst/>
+                        </a:rPr>
+                        <a:t>PLC Siemens S7</a:t>
+                      </a:r>
+                      <a:endParaRPr lang="en-GB" sz="1400" kern="800" dirty="0">
+                        <a:effectLst/>
+                        <a:latin typeface="Times" panose="02020603050405020304" pitchFamily="18" charset="0"/>
+                        <a:ea typeface="Times New Roman" panose="02020603050405020304" pitchFamily="18" charset="0"/>
+                        <a:cs typeface="Times New Roman" panose="02020603050405020304" pitchFamily="18" charset="0"/>
+                      </a:endParaRPr>
+                    </a:p>
+                  </a:txBody>
+                  <a:tcPr marL="56922" marR="56922" marT="0" marB="0"/>
+                </a:tc>
+                <a:tc>
+                  <a:txBody>
+                    <a:bodyPr/>
+                    <a:lstStyle/>
+                    <a:p>
+                      <a:pPr indent="118745" algn="l">
+                        <a:spcAft>
+                          <a:spcPts val="0"/>
+                        </a:spcAft>
+                      </a:pPr>
+                      <a:r>
+                        <a:rPr lang="en-US" sz="1400" b="1" kern="800" dirty="0">
+                          <a:solidFill>
+                            <a:srgbClr val="92D050"/>
+                          </a:solidFill>
+                          <a:effectLst/>
+                        </a:rPr>
+                        <a:t>production</a:t>
+                      </a:r>
+                      <a:endParaRPr lang="en-GB" sz="1400" b="1" kern="800" dirty="0">
                         <a:solidFill>
                           <a:srgbClr val="92D050"/>
                         </a:solidFill>
@@ -9737,12 +10233,12 @@
                         </a:spcAft>
                       </a:pPr>
                       <a:r>
-                        <a:rPr lang="en-US" sz="1600" kern="800">
+                        <a:rPr lang="en-US" sz="1400" kern="800">
                           <a:effectLst/>
                         </a:rPr>
                         <a:t> </a:t>
                       </a:r>
-                      <a:endParaRPr lang="en-GB" sz="1600" kern="800">
+                      <a:endParaRPr lang="en-GB" sz="1400" kern="800">
                         <a:effectLst/>
                         <a:latin typeface="Times" panose="02020603050405020304" pitchFamily="18" charset="0"/>
                         <a:ea typeface="Times New Roman" panose="02020603050405020304" pitchFamily="18" charset="0"/>
@@ -9763,12 +10259,12 @@
                         </a:spcAft>
                       </a:pPr>
                       <a:r>
-                        <a:rPr lang="en-US" sz="1600" kern="800">
+                        <a:rPr lang="en-US" sz="1400" kern="800" dirty="0">
                           <a:effectLst/>
                         </a:rPr>
                         <a:t>PLC Beckhoff</a:t>
                       </a:r>
-                      <a:endParaRPr lang="en-GB" sz="1600" kern="800">
+                      <a:endParaRPr lang="en-GB" sz="1400" kern="800" dirty="0">
                         <a:effectLst/>
                         <a:latin typeface="Times" panose="02020603050405020304" pitchFamily="18" charset="0"/>
                         <a:ea typeface="Times New Roman" panose="02020603050405020304" pitchFamily="18" charset="0"/>
@@ -9789,7 +10285,7 @@
                         </a:spcAft>
                       </a:pPr>
                       <a:r>
-                        <a:rPr lang="en-US" sz="1600" b="1" kern="800" dirty="0">
+                        <a:rPr lang="en-US" sz="1400" b="1" kern="800" dirty="0">
                           <a:solidFill>
                             <a:srgbClr val="92D050"/>
                           </a:solidFill>
@@ -9797,7 +10293,7 @@
                         </a:rPr>
                         <a:t>production</a:t>
                       </a:r>
-                      <a:endParaRPr lang="en-GB" sz="1600" b="1" kern="800" dirty="0">
+                      <a:endParaRPr lang="en-GB" sz="1400" b="1" kern="800" dirty="0">
                         <a:solidFill>
                           <a:srgbClr val="92D050"/>
                         </a:solidFill>
@@ -9837,7 +10333,7 @@
           <a:p>
             <a:fld id="{D57F1E4F-1CFF-5643-939E-02111984F565}" type="slidenum">
               <a:rPr lang="en-US" smtClean="0"/>
-              <a:t>15</a:t>
+              <a:t>16</a:t>
             </a:fld>
             <a:endParaRPr lang="en-US" dirty="0"/>
           </a:p>
@@ -9846,7 +10342,7 @@
     </p:spTree>
     <p:extLst>
       <p:ext uri="{BB962C8B-B14F-4D97-AF65-F5344CB8AC3E}">
-        <p14:creationId xmlns:p14="http://schemas.microsoft.com/office/powerpoint/2010/main" val="535711414"/>
+        <p14:creationId xmlns:p14="http://schemas.microsoft.com/office/powerpoint/2010/main" val="1725163235"/>
       </p:ext>
     </p:extLst>
   </p:cSld>
@@ -9856,7 +10352,7 @@
 </p:sld>
 </file>
 
-<file path=ppt/slides/slide16.xml><?xml version="1.0" encoding="utf-8"?>
+<file path=ppt/slides/slide17.xml><?xml version="1.0" encoding="utf-8"?>
 <p:sld xmlns:a="http://schemas.openxmlformats.org/drawingml/2006/main" xmlns:r="http://schemas.openxmlformats.org/officeDocument/2006/relationships" xmlns:p="http://schemas.openxmlformats.org/presentationml/2006/main">
   <p:cSld>
     <p:spTree>
@@ -9890,7 +10386,7 @@
           <a:p>
             <a:r>
               <a:rPr lang="en-US" dirty="0"/>
-              <a:t>OPC UA Integration Workflow</a:t>
+              <a:t>Manual Integration Workflow</a:t>
             </a:r>
             <a:br>
               <a:rPr lang="en-US" dirty="0"/>
@@ -10094,7 +10590,7 @@
           <a:p>
             <a:fld id="{D57F1E4F-1CFF-5643-939E-02111984F565}" type="slidenum">
               <a:rPr lang="en-US" smtClean="0"/>
-              <a:t>16</a:t>
+              <a:t>17</a:t>
             </a:fld>
             <a:endParaRPr lang="en-US" dirty="0"/>
           </a:p>
@@ -10264,322 +10760,6 @@
 </p:sld>
 </file>
 
-<file path=ppt/slides/slide17.xml><?xml version="1.0" encoding="utf-8"?>
-<p:sld xmlns:a="http://schemas.openxmlformats.org/drawingml/2006/main" xmlns:r="http://schemas.openxmlformats.org/officeDocument/2006/relationships" xmlns:p="http://schemas.openxmlformats.org/presentationml/2006/main">
-  <p:cSld>
-    <p:spTree>
-      <p:nvGrpSpPr>
-        <p:cNvPr id="1" name=""/>
-        <p:cNvGrpSpPr/>
-        <p:nvPr/>
-      </p:nvGrpSpPr>
-      <p:grpSpPr>
-        <a:xfrm>
-          <a:off x="0" y="0"/>
-          <a:ext cx="0" cy="0"/>
-          <a:chOff x="0" y="0"/>
-          <a:chExt cx="0" cy="0"/>
-        </a:xfrm>
-      </p:grpSpPr>
-      <p:sp>
-        <p:nvSpPr>
-          <p:cNvPr id="2" name="Title 1"/>
-          <p:cNvSpPr>
-            <a:spLocks noGrp="1"/>
-          </p:cNvSpPr>
-          <p:nvPr>
-            <p:ph type="title"/>
-          </p:nvPr>
-        </p:nvSpPr>
-        <p:spPr/>
-        <p:txBody>
-          <a:bodyPr/>
-          <a:lstStyle/>
-          <a:p>
-            <a:r>
-              <a:rPr lang="en-US" dirty="0"/>
-              <a:t>OPC UA Integration Workflow</a:t>
-            </a:r>
-            <a:br>
-              <a:rPr lang="en-US" dirty="0"/>
-            </a:br>
-            <a:r>
-              <a:rPr lang="en-US" sz="2800" i="1" dirty="0"/>
-              <a:t>Step 2: Configure the IOC</a:t>
-            </a:r>
-            <a:endParaRPr lang="en-US" dirty="0"/>
-          </a:p>
-        </p:txBody>
-      </p:sp>
-      <p:sp>
-        <p:nvSpPr>
-          <p:cNvPr id="3" name="Content Placeholder 2"/>
-          <p:cNvSpPr>
-            <a:spLocks noGrp="1"/>
-          </p:cNvSpPr>
-          <p:nvPr>
-            <p:ph idx="1"/>
-          </p:nvPr>
-        </p:nvSpPr>
-        <p:spPr/>
-        <p:txBody>
-          <a:bodyPr/>
-          <a:lstStyle/>
-          <a:p>
-            <a:r>
-              <a:rPr lang="en-US" dirty="0"/>
-              <a:t>Configure the OPC UA server connections from the startup script</a:t>
-            </a:r>
-          </a:p>
-          <a:p>
-            <a:endParaRPr lang="en-US" dirty="0"/>
-          </a:p>
-          <a:p>
-            <a:endParaRPr lang="en-US" dirty="0"/>
-          </a:p>
-          <a:p>
-            <a:r>
-              <a:rPr lang="en-US" dirty="0"/>
-              <a:t>Add an EPICS record to your database</a:t>
-            </a:r>
-          </a:p>
-        </p:txBody>
-      </p:sp>
-      <p:sp>
-        <p:nvSpPr>
-          <p:cNvPr id="4" name="Textfeld 3"/>
-          <p:cNvSpPr txBox="1"/>
-          <p:nvPr/>
-        </p:nvSpPr>
-        <p:spPr>
-          <a:xfrm>
-            <a:off x="1470516" y="2365779"/>
-            <a:ext cx="9992092" cy="615553"/>
-          </a:xfrm>
-          <a:prstGeom prst="rect">
-            <a:avLst/>
-          </a:prstGeom>
-          <a:noFill/>
-        </p:spPr>
-        <p:txBody>
-          <a:bodyPr wrap="square" lIns="0" tIns="0" rIns="0" bIns="0" rtlCol="0">
-            <a:spAutoFit/>
-          </a:bodyPr>
-          <a:lstStyle/>
-          <a:p>
-            <a:pPr marL="82550" lvl="2"/>
-            <a:r>
-              <a:rPr lang="en-US" altLang="en-US" sz="2000" dirty="0" err="1">
-                <a:latin typeface="Consolas" panose="020B0609020204030204" pitchFamily="49" charset="0"/>
-              </a:rPr>
-              <a:t>opcuaSession</a:t>
-            </a:r>
-            <a:r>
-              <a:rPr lang="en-US" altLang="en-US" sz="2000" dirty="0">
-                <a:latin typeface="Consolas" panose="020B0609020204030204" pitchFamily="49" charset="0"/>
-              </a:rPr>
-              <a:t> PLC1 </a:t>
-            </a:r>
-            <a:r>
-              <a:rPr lang="en-US" altLang="en-US" sz="2000" dirty="0" err="1">
-                <a:latin typeface="Consolas" panose="020B0609020204030204" pitchFamily="49" charset="0"/>
-              </a:rPr>
-              <a:t>opc.tcp</a:t>
-            </a:r>
-            <a:r>
-              <a:rPr lang="en-US" altLang="en-US" sz="2000" dirty="0">
-                <a:latin typeface="Consolas" panose="020B0609020204030204" pitchFamily="49" charset="0"/>
-              </a:rPr>
-              <a:t>://plc1.controls.local:4840 sec-mode=None</a:t>
-            </a:r>
-          </a:p>
-          <a:p>
-            <a:pPr marL="82550" lvl="2"/>
-            <a:r>
-              <a:rPr lang="en-US" altLang="en-US" sz="2000" dirty="0" err="1">
-                <a:latin typeface="Consolas" panose="020B0609020204030204" pitchFamily="49" charset="0"/>
-              </a:rPr>
-              <a:t>opcuaSubscription</a:t>
-            </a:r>
-            <a:r>
-              <a:rPr lang="en-US" altLang="en-US" sz="2000" dirty="0">
-                <a:latin typeface="Consolas" panose="020B0609020204030204" pitchFamily="49" charset="0"/>
-              </a:rPr>
-              <a:t> </a:t>
-            </a:r>
-            <a:r>
-              <a:rPr lang="en-US" altLang="en-US" sz="2000" dirty="0">
-                <a:solidFill>
-                  <a:schemeClr val="accent3"/>
-                </a:solidFill>
-                <a:latin typeface="Consolas" panose="020B0609020204030204" pitchFamily="49" charset="0"/>
-              </a:rPr>
-              <a:t>SUB1</a:t>
-            </a:r>
-            <a:r>
-              <a:rPr lang="en-US" altLang="en-US" sz="2000" dirty="0">
-                <a:latin typeface="Consolas" panose="020B0609020204030204" pitchFamily="49" charset="0"/>
-              </a:rPr>
-              <a:t> PLC1 200</a:t>
-            </a:r>
-          </a:p>
-        </p:txBody>
-      </p:sp>
-      <p:sp>
-        <p:nvSpPr>
-          <p:cNvPr id="5" name="Textfeld 3"/>
-          <p:cNvSpPr txBox="1"/>
-          <p:nvPr/>
-        </p:nvSpPr>
-        <p:spPr>
-          <a:xfrm>
-            <a:off x="2388561" y="3844224"/>
-            <a:ext cx="8748583" cy="1538883"/>
-          </a:xfrm>
-          <a:prstGeom prst="rect">
-            <a:avLst/>
-          </a:prstGeom>
-          <a:noFill/>
-        </p:spPr>
-        <p:txBody>
-          <a:bodyPr wrap="square" lIns="0" tIns="0" rIns="0" bIns="0" rtlCol="0">
-            <a:spAutoFit/>
-          </a:bodyPr>
-          <a:lstStyle/>
-          <a:p>
-            <a:pPr marL="82550" lvl="2"/>
-            <a:r>
-              <a:rPr lang="en-US" altLang="en-US" sz="2000" dirty="0">
-                <a:latin typeface="Consolas" panose="020B0609020204030204" pitchFamily="49" charset="0"/>
-              </a:rPr>
-              <a:t>record(</a:t>
-            </a:r>
-            <a:r>
-              <a:rPr lang="en-US" altLang="en-US" sz="2000" dirty="0" err="1">
-                <a:latin typeface="Consolas" panose="020B0609020204030204" pitchFamily="49" charset="0"/>
-              </a:rPr>
-              <a:t>ai</a:t>
-            </a:r>
-            <a:r>
-              <a:rPr lang="en-US" altLang="en-US" sz="2000" dirty="0">
-                <a:latin typeface="Consolas" panose="020B0609020204030204" pitchFamily="49" charset="0"/>
-              </a:rPr>
-              <a:t>, "$(DEVICE):dbl1") {</a:t>
-            </a:r>
-          </a:p>
-          <a:p>
-            <a:pPr marL="82550" lvl="2"/>
-            <a:r>
-              <a:rPr lang="en-US" altLang="en-US" sz="2000" dirty="0">
-                <a:latin typeface="Consolas" panose="020B0609020204030204" pitchFamily="49" charset="0"/>
-              </a:rPr>
-              <a:t>    field(DTYP, "</a:t>
-            </a:r>
-            <a:r>
-              <a:rPr lang="en-US" altLang="en-US" sz="2000" b="1" dirty="0">
-                <a:latin typeface="Consolas" panose="020B0609020204030204" pitchFamily="49" charset="0"/>
-              </a:rPr>
-              <a:t>OPCUA</a:t>
-            </a:r>
-            <a:r>
-              <a:rPr lang="en-US" altLang="en-US" sz="2000" dirty="0">
-                <a:latin typeface="Consolas" panose="020B0609020204030204" pitchFamily="49" charset="0"/>
-              </a:rPr>
-              <a:t>")</a:t>
-            </a:r>
-          </a:p>
-          <a:p>
-            <a:pPr marL="82550" lvl="2"/>
-            <a:r>
-              <a:rPr lang="en-US" altLang="en-US" sz="2000" dirty="0">
-                <a:latin typeface="Consolas" panose="020B0609020204030204" pitchFamily="49" charset="0"/>
-              </a:rPr>
-              <a:t>    field(INP,  "@</a:t>
-            </a:r>
-            <a:r>
-              <a:rPr lang="en-US" altLang="en-US" sz="2000" dirty="0">
-                <a:solidFill>
-                  <a:schemeClr val="accent3"/>
-                </a:solidFill>
-                <a:latin typeface="Consolas" panose="020B0609020204030204" pitchFamily="49" charset="0"/>
-              </a:rPr>
-              <a:t>SUB1</a:t>
-            </a:r>
-            <a:r>
-              <a:rPr lang="en-US" altLang="en-US" sz="2000" dirty="0">
-                <a:latin typeface="Consolas" panose="020B0609020204030204" pitchFamily="49" charset="0"/>
-              </a:rPr>
-              <a:t> ns=3;s=\"Data_block_1\".\"</a:t>
-            </a:r>
-            <a:r>
-              <a:rPr lang="en-US" altLang="en-US" sz="2000" dirty="0" err="1">
-                <a:latin typeface="Consolas" panose="020B0609020204030204" pitchFamily="49" charset="0"/>
-              </a:rPr>
-              <a:t>myDouble</a:t>
-            </a:r>
-            <a:r>
-              <a:rPr lang="en-US" altLang="en-US" sz="2000" dirty="0">
-                <a:latin typeface="Consolas" panose="020B0609020204030204" pitchFamily="49" charset="0"/>
-              </a:rPr>
-              <a:t>\"")</a:t>
-            </a:r>
-          </a:p>
-          <a:p>
-            <a:pPr marL="82550" lvl="2"/>
-            <a:r>
-              <a:rPr lang="en-US" altLang="en-US" sz="2000" dirty="0">
-                <a:latin typeface="Consolas" panose="020B0609020204030204" pitchFamily="49" charset="0"/>
-              </a:rPr>
-              <a:t>    field(PREC, "3")</a:t>
-            </a:r>
-          </a:p>
-          <a:p>
-            <a:pPr marL="82550" lvl="2"/>
-            <a:r>
-              <a:rPr lang="en-US" altLang="en-US" sz="2000" dirty="0">
-                <a:latin typeface="Consolas" panose="020B0609020204030204" pitchFamily="49" charset="0"/>
-              </a:rPr>
-              <a:t>}</a:t>
-            </a:r>
-          </a:p>
-        </p:txBody>
-      </p:sp>
-      <p:sp>
-        <p:nvSpPr>
-          <p:cNvPr id="6" name="Slide Number Placeholder 5"/>
-          <p:cNvSpPr>
-            <a:spLocks noGrp="1"/>
-          </p:cNvSpPr>
-          <p:nvPr>
-            <p:ph type="sldNum" sz="quarter" idx="12"/>
-          </p:nvPr>
-        </p:nvSpPr>
-        <p:spPr/>
-        <p:txBody>
-          <a:bodyPr/>
-          <a:lstStyle/>
-          <a:p>
-            <a:fld id="{D57F1E4F-1CFF-5643-939E-02111984F565}" type="slidenum">
-              <a:rPr lang="en-US" smtClean="0"/>
-              <a:t>17</a:t>
-            </a:fld>
-            <a:endParaRPr lang="en-US" dirty="0"/>
-          </a:p>
-        </p:txBody>
-      </p:sp>
-    </p:spTree>
-    <p:extLst>
-      <p:ext uri="{BB962C8B-B14F-4D97-AF65-F5344CB8AC3E}">
-        <p14:creationId xmlns:p14="http://schemas.microsoft.com/office/powerpoint/2010/main" val="3946426452"/>
-      </p:ext>
-    </p:extLst>
-  </p:cSld>
-  <p:clrMapOvr>
-    <a:masterClrMapping/>
-  </p:clrMapOvr>
-</p:sld>
-</file>
-
 <file path=ppt/slides/slide18.xml><?xml version="1.0" encoding="utf-8"?>
 <p:sld xmlns:a="http://schemas.openxmlformats.org/drawingml/2006/main" xmlns:r="http://schemas.openxmlformats.org/officeDocument/2006/relationships" xmlns:p="http://schemas.openxmlformats.org/presentationml/2006/main">
   <p:cSld>
@@ -10614,7 +10794,323 @@
           <a:p>
             <a:r>
               <a:rPr lang="en-US" dirty="0"/>
-              <a:t>OPC UA Integration Workflow</a:t>
+              <a:t>Manual Integration Workflow</a:t>
+            </a:r>
+            <a:br>
+              <a:rPr lang="en-US" dirty="0"/>
+            </a:br>
+            <a:r>
+              <a:rPr lang="en-US" sz="2800" i="1" dirty="0"/>
+              <a:t>Step 2: Configure the IOC</a:t>
+            </a:r>
+            <a:endParaRPr lang="en-US" dirty="0"/>
+          </a:p>
+        </p:txBody>
+      </p:sp>
+      <p:sp>
+        <p:nvSpPr>
+          <p:cNvPr id="3" name="Content Placeholder 2"/>
+          <p:cNvSpPr>
+            <a:spLocks noGrp="1"/>
+          </p:cNvSpPr>
+          <p:nvPr>
+            <p:ph idx="1"/>
+          </p:nvPr>
+        </p:nvSpPr>
+        <p:spPr/>
+        <p:txBody>
+          <a:bodyPr/>
+          <a:lstStyle/>
+          <a:p>
+            <a:r>
+              <a:rPr lang="en-US" dirty="0"/>
+              <a:t>Configure the OPC UA server connections from the startup script</a:t>
+            </a:r>
+          </a:p>
+          <a:p>
+            <a:endParaRPr lang="en-US" dirty="0"/>
+          </a:p>
+          <a:p>
+            <a:endParaRPr lang="en-US" dirty="0"/>
+          </a:p>
+          <a:p>
+            <a:r>
+              <a:rPr lang="en-US" dirty="0"/>
+              <a:t>Add an EPICS record to your database</a:t>
+            </a:r>
+          </a:p>
+        </p:txBody>
+      </p:sp>
+      <p:sp>
+        <p:nvSpPr>
+          <p:cNvPr id="4" name="Textfeld 3"/>
+          <p:cNvSpPr txBox="1"/>
+          <p:nvPr/>
+        </p:nvSpPr>
+        <p:spPr>
+          <a:xfrm>
+            <a:off x="1470516" y="2365779"/>
+            <a:ext cx="9992092" cy="615553"/>
+          </a:xfrm>
+          <a:prstGeom prst="rect">
+            <a:avLst/>
+          </a:prstGeom>
+          <a:noFill/>
+        </p:spPr>
+        <p:txBody>
+          <a:bodyPr wrap="square" lIns="0" tIns="0" rIns="0" bIns="0" rtlCol="0">
+            <a:spAutoFit/>
+          </a:bodyPr>
+          <a:lstStyle/>
+          <a:p>
+            <a:pPr marL="82550" lvl="2"/>
+            <a:r>
+              <a:rPr lang="en-US" altLang="en-US" sz="2000" dirty="0" err="1">
+                <a:latin typeface="Consolas" panose="020B0609020204030204" pitchFamily="49" charset="0"/>
+              </a:rPr>
+              <a:t>opcuaSession</a:t>
+            </a:r>
+            <a:r>
+              <a:rPr lang="en-US" altLang="en-US" sz="2000" dirty="0">
+                <a:latin typeface="Consolas" panose="020B0609020204030204" pitchFamily="49" charset="0"/>
+              </a:rPr>
+              <a:t> PLC1 </a:t>
+            </a:r>
+            <a:r>
+              <a:rPr lang="en-US" altLang="en-US" sz="2000" dirty="0" err="1">
+                <a:latin typeface="Consolas" panose="020B0609020204030204" pitchFamily="49" charset="0"/>
+              </a:rPr>
+              <a:t>opc.tcp</a:t>
+            </a:r>
+            <a:r>
+              <a:rPr lang="en-US" altLang="en-US" sz="2000" dirty="0">
+                <a:latin typeface="Consolas" panose="020B0609020204030204" pitchFamily="49" charset="0"/>
+              </a:rPr>
+              <a:t>://plc1.controls.local:4840 sec-mode=None</a:t>
+            </a:r>
+          </a:p>
+          <a:p>
+            <a:pPr marL="82550" lvl="2"/>
+            <a:r>
+              <a:rPr lang="en-US" altLang="en-US" sz="2000" dirty="0" err="1">
+                <a:latin typeface="Consolas" panose="020B0609020204030204" pitchFamily="49" charset="0"/>
+              </a:rPr>
+              <a:t>opcuaSubscription</a:t>
+            </a:r>
+            <a:r>
+              <a:rPr lang="en-US" altLang="en-US" sz="2000" dirty="0">
+                <a:latin typeface="Consolas" panose="020B0609020204030204" pitchFamily="49" charset="0"/>
+              </a:rPr>
+              <a:t> </a:t>
+            </a:r>
+            <a:r>
+              <a:rPr lang="en-US" altLang="en-US" sz="2000" dirty="0">
+                <a:solidFill>
+                  <a:schemeClr val="accent3"/>
+                </a:solidFill>
+                <a:latin typeface="Consolas" panose="020B0609020204030204" pitchFamily="49" charset="0"/>
+              </a:rPr>
+              <a:t>SUB1</a:t>
+            </a:r>
+            <a:r>
+              <a:rPr lang="en-US" altLang="en-US" sz="2000" dirty="0">
+                <a:latin typeface="Consolas" panose="020B0609020204030204" pitchFamily="49" charset="0"/>
+              </a:rPr>
+              <a:t> PLC1 200</a:t>
+            </a:r>
+          </a:p>
+        </p:txBody>
+      </p:sp>
+      <p:sp>
+        <p:nvSpPr>
+          <p:cNvPr id="5" name="Textfeld 3"/>
+          <p:cNvSpPr txBox="1"/>
+          <p:nvPr/>
+        </p:nvSpPr>
+        <p:spPr>
+          <a:xfrm>
+            <a:off x="2388561" y="3844224"/>
+            <a:ext cx="8748583" cy="1538883"/>
+          </a:xfrm>
+          <a:prstGeom prst="rect">
+            <a:avLst/>
+          </a:prstGeom>
+          <a:noFill/>
+        </p:spPr>
+        <p:txBody>
+          <a:bodyPr wrap="square" lIns="0" tIns="0" rIns="0" bIns="0" rtlCol="0">
+            <a:spAutoFit/>
+          </a:bodyPr>
+          <a:lstStyle/>
+          <a:p>
+            <a:pPr marL="82550" lvl="2"/>
+            <a:r>
+              <a:rPr lang="en-US" altLang="en-US" sz="2000" dirty="0">
+                <a:latin typeface="Consolas" panose="020B0609020204030204" pitchFamily="49" charset="0"/>
+              </a:rPr>
+              <a:t>record(</a:t>
+            </a:r>
+            <a:r>
+              <a:rPr lang="en-US" altLang="en-US" sz="2000" dirty="0" err="1">
+                <a:latin typeface="Consolas" panose="020B0609020204030204" pitchFamily="49" charset="0"/>
+              </a:rPr>
+              <a:t>ai</a:t>
+            </a:r>
+            <a:r>
+              <a:rPr lang="en-US" altLang="en-US" sz="2000" dirty="0">
+                <a:latin typeface="Consolas" panose="020B0609020204030204" pitchFamily="49" charset="0"/>
+              </a:rPr>
+              <a:t>, "$(DEVICE):dbl1") {</a:t>
+            </a:r>
+          </a:p>
+          <a:p>
+            <a:pPr marL="82550" lvl="2"/>
+            <a:r>
+              <a:rPr lang="en-US" altLang="en-US" sz="2000" dirty="0">
+                <a:latin typeface="Consolas" panose="020B0609020204030204" pitchFamily="49" charset="0"/>
+              </a:rPr>
+              <a:t>    field(DTYP, "</a:t>
+            </a:r>
+            <a:r>
+              <a:rPr lang="en-US" altLang="en-US" sz="2000" b="1" dirty="0">
+                <a:latin typeface="Consolas" panose="020B0609020204030204" pitchFamily="49" charset="0"/>
+              </a:rPr>
+              <a:t>OPCUA</a:t>
+            </a:r>
+            <a:r>
+              <a:rPr lang="en-US" altLang="en-US" sz="2000" dirty="0">
+                <a:latin typeface="Consolas" panose="020B0609020204030204" pitchFamily="49" charset="0"/>
+              </a:rPr>
+              <a:t>")</a:t>
+            </a:r>
+          </a:p>
+          <a:p>
+            <a:pPr marL="82550" lvl="2"/>
+            <a:r>
+              <a:rPr lang="en-US" altLang="en-US" sz="2000" dirty="0">
+                <a:latin typeface="Consolas" panose="020B0609020204030204" pitchFamily="49" charset="0"/>
+              </a:rPr>
+              <a:t>    field(INP,  "@</a:t>
+            </a:r>
+            <a:r>
+              <a:rPr lang="en-US" altLang="en-US" sz="2000" dirty="0">
+                <a:solidFill>
+                  <a:schemeClr val="accent3"/>
+                </a:solidFill>
+                <a:latin typeface="Consolas" panose="020B0609020204030204" pitchFamily="49" charset="0"/>
+              </a:rPr>
+              <a:t>SUB1</a:t>
+            </a:r>
+            <a:r>
+              <a:rPr lang="en-US" altLang="en-US" sz="2000" dirty="0">
+                <a:latin typeface="Consolas" panose="020B0609020204030204" pitchFamily="49" charset="0"/>
+              </a:rPr>
+              <a:t> ns=3;s=\"Data_block_1\".\"</a:t>
+            </a:r>
+            <a:r>
+              <a:rPr lang="en-US" altLang="en-US" sz="2000" dirty="0" err="1">
+                <a:latin typeface="Consolas" panose="020B0609020204030204" pitchFamily="49" charset="0"/>
+              </a:rPr>
+              <a:t>myDouble</a:t>
+            </a:r>
+            <a:r>
+              <a:rPr lang="en-US" altLang="en-US" sz="2000" dirty="0">
+                <a:latin typeface="Consolas" panose="020B0609020204030204" pitchFamily="49" charset="0"/>
+              </a:rPr>
+              <a:t>\"")</a:t>
+            </a:r>
+          </a:p>
+          <a:p>
+            <a:pPr marL="82550" lvl="2"/>
+            <a:r>
+              <a:rPr lang="en-US" altLang="en-US" sz="2000" dirty="0">
+                <a:latin typeface="Consolas" panose="020B0609020204030204" pitchFamily="49" charset="0"/>
+              </a:rPr>
+              <a:t>    field(PREC, "3")</a:t>
+            </a:r>
+          </a:p>
+          <a:p>
+            <a:pPr marL="82550" lvl="2"/>
+            <a:r>
+              <a:rPr lang="en-US" altLang="en-US" sz="2000" dirty="0">
+                <a:latin typeface="Consolas" panose="020B0609020204030204" pitchFamily="49" charset="0"/>
+              </a:rPr>
+              <a:t>}</a:t>
+            </a:r>
+          </a:p>
+        </p:txBody>
+      </p:sp>
+      <p:sp>
+        <p:nvSpPr>
+          <p:cNvPr id="6" name="Slide Number Placeholder 5"/>
+          <p:cNvSpPr>
+            <a:spLocks noGrp="1"/>
+          </p:cNvSpPr>
+          <p:nvPr>
+            <p:ph type="sldNum" sz="quarter" idx="12"/>
+          </p:nvPr>
+        </p:nvSpPr>
+        <p:spPr/>
+        <p:txBody>
+          <a:bodyPr/>
+          <a:lstStyle/>
+          <a:p>
+            <a:fld id="{D57F1E4F-1CFF-5643-939E-02111984F565}" type="slidenum">
+              <a:rPr lang="en-US" smtClean="0"/>
+              <a:t>18</a:t>
+            </a:fld>
+            <a:endParaRPr lang="en-US" dirty="0"/>
+          </a:p>
+        </p:txBody>
+      </p:sp>
+    </p:spTree>
+    <p:extLst>
+      <p:ext uri="{BB962C8B-B14F-4D97-AF65-F5344CB8AC3E}">
+        <p14:creationId xmlns:p14="http://schemas.microsoft.com/office/powerpoint/2010/main" val="3946426452"/>
+      </p:ext>
+    </p:extLst>
+  </p:cSld>
+  <p:clrMapOvr>
+    <a:masterClrMapping/>
+  </p:clrMapOvr>
+</p:sld>
+</file>
+
+<file path=ppt/slides/slide19.xml><?xml version="1.0" encoding="utf-8"?>
+<p:sld xmlns:a="http://schemas.openxmlformats.org/drawingml/2006/main" xmlns:r="http://schemas.openxmlformats.org/officeDocument/2006/relationships" xmlns:p="http://schemas.openxmlformats.org/presentationml/2006/main">
+  <p:cSld>
+    <p:spTree>
+      <p:nvGrpSpPr>
+        <p:cNvPr id="1" name=""/>
+        <p:cNvGrpSpPr/>
+        <p:nvPr/>
+      </p:nvGrpSpPr>
+      <p:grpSpPr>
+        <a:xfrm>
+          <a:off x="0" y="0"/>
+          <a:ext cx="0" cy="0"/>
+          <a:chOff x="0" y="0"/>
+          <a:chExt cx="0" cy="0"/>
+        </a:xfrm>
+      </p:grpSpPr>
+      <p:sp>
+        <p:nvSpPr>
+          <p:cNvPr id="2" name="Title 1"/>
+          <p:cNvSpPr>
+            <a:spLocks noGrp="1"/>
+          </p:cNvSpPr>
+          <p:nvPr>
+            <p:ph type="title"/>
+          </p:nvPr>
+        </p:nvSpPr>
+        <p:spPr/>
+        <p:txBody>
+          <a:bodyPr/>
+          <a:lstStyle/>
+          <a:p>
+            <a:r>
+              <a:rPr lang="en-US" dirty="0"/>
+              <a:t>Manual Integration Workflow</a:t>
             </a:r>
             <a:br>
               <a:rPr lang="en-US" dirty="0"/>
@@ -10673,7 +11169,7 @@
           <a:p>
             <a:fld id="{D57F1E4F-1CFF-5643-939E-02111984F565}" type="slidenum">
               <a:rPr lang="en-US" smtClean="0"/>
-              <a:t>18</a:t>
+              <a:t>19</a:t>
             </a:fld>
             <a:endParaRPr lang="en-US" dirty="0"/>
           </a:p>
@@ -10683,163 +11179,6 @@
     <p:extLst>
       <p:ext uri="{BB962C8B-B14F-4D97-AF65-F5344CB8AC3E}">
         <p14:creationId xmlns:p14="http://schemas.microsoft.com/office/powerpoint/2010/main" val="1691908981"/>
-      </p:ext>
-    </p:extLst>
-  </p:cSld>
-  <p:clrMapOvr>
-    <a:masterClrMapping/>
-  </p:clrMapOvr>
-</p:sld>
-</file>
-
-<file path=ppt/slides/slide19.xml><?xml version="1.0" encoding="utf-8"?>
-<p:sld xmlns:a="http://schemas.openxmlformats.org/drawingml/2006/main" xmlns:r="http://schemas.openxmlformats.org/officeDocument/2006/relationships" xmlns:p="http://schemas.openxmlformats.org/presentationml/2006/main">
-  <p:cSld>
-    <p:spTree>
-      <p:nvGrpSpPr>
-        <p:cNvPr id="1" name=""/>
-        <p:cNvGrpSpPr/>
-        <p:nvPr/>
-      </p:nvGrpSpPr>
-      <p:grpSpPr>
-        <a:xfrm>
-          <a:off x="0" y="0"/>
-          <a:ext cx="0" cy="0"/>
-          <a:chOff x="0" y="0"/>
-          <a:chExt cx="0" cy="0"/>
-        </a:xfrm>
-      </p:grpSpPr>
-      <p:sp>
-        <p:nvSpPr>
-          <p:cNvPr id="2" name="Title 1"/>
-          <p:cNvSpPr>
-            <a:spLocks noGrp="1"/>
-          </p:cNvSpPr>
-          <p:nvPr>
-            <p:ph type="title"/>
-          </p:nvPr>
-        </p:nvSpPr>
-        <p:spPr/>
-        <p:txBody>
-          <a:bodyPr/>
-          <a:lstStyle/>
-          <a:p>
-            <a:r>
-              <a:rPr lang="en-US" dirty="0"/>
-              <a:t>Performance</a:t>
-            </a:r>
-            <a:br>
-              <a:rPr lang="en-US" dirty="0"/>
-            </a:br>
-            <a:r>
-              <a:rPr lang="en-US" sz="2800" i="1" dirty="0"/>
-              <a:t>It All Depends – Mostly on the Server</a:t>
-            </a:r>
-          </a:p>
-        </p:txBody>
-      </p:sp>
-      <p:sp>
-        <p:nvSpPr>
-          <p:cNvPr id="3" name="Content Placeholder 2"/>
-          <p:cNvSpPr>
-            <a:spLocks noGrp="1"/>
-          </p:cNvSpPr>
-          <p:nvPr>
-            <p:ph idx="1"/>
-          </p:nvPr>
-        </p:nvSpPr>
-        <p:spPr>
-          <a:xfrm>
-            <a:off x="1103312" y="1872000"/>
-            <a:ext cx="9342363" cy="4374000"/>
-          </a:xfrm>
-        </p:spPr>
-        <p:txBody>
-          <a:bodyPr>
-            <a:noAutofit/>
-          </a:bodyPr>
-          <a:lstStyle/>
-          <a:p>
-            <a:r>
-              <a:rPr lang="en-US" dirty="0"/>
-              <a:t>Early tests by TCS, comparing TCP Data Block transfer with OPC UA:</a:t>
-            </a:r>
-            <a:br>
-              <a:rPr lang="en-US" dirty="0"/>
-            </a:br>
-            <a:r>
-              <a:rPr lang="en-US" dirty="0"/>
-              <a:t>“big” S7-1518, </a:t>
-            </a:r>
-            <a:r>
-              <a:rPr lang="en-US" b="1" dirty="0">
-                <a:solidFill>
-                  <a:srgbClr val="FFFF00"/>
-                </a:solidFill>
-              </a:rPr>
-              <a:t>32kB data</a:t>
-            </a:r>
-            <a:r>
-              <a:rPr lang="en-US" dirty="0"/>
-              <a:t> (integers), “empty” / 40ms cycle artificial load </a:t>
-            </a:r>
-          </a:p>
-          <a:p>
-            <a:endParaRPr lang="en-US" dirty="0"/>
-          </a:p>
-        </p:txBody>
-      </p:sp>
-      <p:pic>
-        <p:nvPicPr>
-          <p:cNvPr id="4" name="Picture 3"/>
-          <p:cNvPicPr>
-            <a:picLocks noChangeAspect="1"/>
-          </p:cNvPicPr>
-          <p:nvPr/>
-        </p:nvPicPr>
-        <p:blipFill>
-          <a:blip r:embed="rId2"/>
-          <a:stretch>
-            <a:fillRect/>
-          </a:stretch>
-        </p:blipFill>
-        <p:spPr>
-          <a:xfrm>
-            <a:off x="1574859" y="2603668"/>
-            <a:ext cx="8623390" cy="4163503"/>
-          </a:xfrm>
-          <a:prstGeom prst="rect">
-            <a:avLst/>
-          </a:prstGeom>
-        </p:spPr>
-      </p:pic>
-      <p:sp>
-        <p:nvSpPr>
-          <p:cNvPr id="5" name="Slide Number Placeholder 4"/>
-          <p:cNvSpPr>
-            <a:spLocks noGrp="1"/>
-          </p:cNvSpPr>
-          <p:nvPr>
-            <p:ph type="sldNum" sz="quarter" idx="12"/>
-          </p:nvPr>
-        </p:nvSpPr>
-        <p:spPr/>
-        <p:txBody>
-          <a:bodyPr/>
-          <a:lstStyle/>
-          <a:p>
-            <a:fld id="{D57F1E4F-1CFF-5643-939E-02111984F565}" type="slidenum">
-              <a:rPr lang="en-US" smtClean="0"/>
-              <a:t>19</a:t>
-            </a:fld>
-            <a:endParaRPr lang="en-US" dirty="0"/>
-          </a:p>
-        </p:txBody>
-      </p:sp>
-    </p:spTree>
-    <p:extLst>
-      <p:ext uri="{BB962C8B-B14F-4D97-AF65-F5344CB8AC3E}">
-        <p14:creationId xmlns:p14="http://schemas.microsoft.com/office/powerpoint/2010/main" val="2532371146"/>
       </p:ext>
     </p:extLst>
   </p:cSld>
@@ -11389,21 +11728,14 @@
           <a:p>
             <a:r>
               <a:rPr lang="en-US" dirty="0"/>
-              <a:t>Test in 2021 for ITER building automation integration</a:t>
-            </a:r>
-          </a:p>
-          <a:p>
-            <a:pPr lvl="1"/>
-            <a:r>
-              <a:rPr lang="en-US" dirty="0"/>
-              <a:t>Trying to verify realistic conditions </a:t>
-            </a:r>
-          </a:p>
-          <a:p>
-            <a:pPr lvl="1"/>
-            <a:r>
-              <a:rPr lang="en-US" dirty="0"/>
-              <a:t>3x the estimated size (</a:t>
+              <a:t>Early tests by TCS, comparing TCP Data Block transfer with OPC UA:</a:t>
+            </a:r>
+            <a:br>
+              <a:rPr lang="en-US" dirty="0"/>
+            </a:br>
+            <a:r>
+              <a:rPr lang="en-US" dirty="0"/>
+              <a:t>“big” S7-1518, </a:t>
             </a:r>
             <a:r>
               <a:rPr lang="en-US" b="1" dirty="0">
@@ -11411,66 +11743,45 @@
                   <a:srgbClr val="FFFF00"/>
                 </a:solidFill>
               </a:rPr>
-              <a:t>500kB data</a:t>
-            </a:r>
-            <a:r>
-              <a:rPr lang="en-US" dirty="0"/>
-              <a:t>, mixed types)</a:t>
-            </a:r>
-          </a:p>
-          <a:p>
-            <a:pPr lvl="1"/>
-            <a:r>
-              <a:rPr lang="en-US" dirty="0"/>
-              <a:t>On a mid-size S7-1516</a:t>
-            </a:r>
-          </a:p>
-          <a:p>
-            <a:pPr lvl="1"/>
-            <a:r>
-              <a:rPr lang="en-US" dirty="0"/>
-              <a:t>250ms sampling/publishing period</a:t>
-            </a:r>
-          </a:p>
-          <a:p>
-            <a:pPr lvl="1"/>
-            <a:r>
-              <a:rPr lang="en-US" dirty="0"/>
-              <a:t>No performance fine-tuning</a:t>
-            </a:r>
-          </a:p>
-          <a:p>
-            <a:r>
-              <a:rPr lang="en-US" dirty="0"/>
-              <a:t>Results:</a:t>
-            </a:r>
-          </a:p>
-          <a:p>
-            <a:pPr lvl="1"/>
-            <a:r>
-              <a:rPr lang="en-US" dirty="0"/>
-              <a:t>Fit for this purpose</a:t>
-            </a:r>
-          </a:p>
-          <a:p>
-            <a:pPr lvl="1"/>
-            <a:r>
-              <a:rPr lang="en-US" dirty="0"/>
-              <a:t>Best performance when using few large structures</a:t>
-            </a:r>
-          </a:p>
-          <a:p>
-            <a:pPr lvl="1"/>
+              <a:t>32kB data</a:t>
+            </a:r>
+            <a:r>
+              <a:rPr lang="en-US" dirty="0"/>
+              <a:t> (integers), “empty” / 40ms cycle artificial load </a:t>
+            </a:r>
+          </a:p>
+          <a:p>
             <a:endParaRPr lang="en-US" dirty="0"/>
           </a:p>
-          <a:p>
-            <a:endParaRPr lang="en-US" dirty="0"/>
-          </a:p>
-        </p:txBody>
-      </p:sp>
-      <p:sp>
-        <p:nvSpPr>
-          <p:cNvPr id="4" name="Slide Number Placeholder 3"/>
+        </p:txBody>
+      </p:sp>
+      <p:pic>
+        <p:nvPicPr>
+          <p:cNvPr id="4" name="Picture 3"/>
+          <p:cNvPicPr>
+            <a:picLocks noChangeAspect="1"/>
+          </p:cNvPicPr>
+          <p:nvPr/>
+        </p:nvPicPr>
+        <p:blipFill>
+          <a:blip r:embed="rId2"/>
+          <a:stretch>
+            <a:fillRect/>
+          </a:stretch>
+        </p:blipFill>
+        <p:spPr>
+          <a:xfrm>
+            <a:off x="1574859" y="2603668"/>
+            <a:ext cx="8623390" cy="4163503"/>
+          </a:xfrm>
+          <a:prstGeom prst="rect">
+            <a:avLst/>
+          </a:prstGeom>
+        </p:spPr>
+      </p:pic>
+      <p:sp>
+        <p:nvSpPr>
+          <p:cNvPr id="5" name="Slide Number Placeholder 4"/>
           <p:cNvSpPr>
             <a:spLocks noGrp="1"/>
           </p:cNvSpPr>
@@ -11494,7 +11805,7 @@
     </p:spTree>
     <p:extLst>
       <p:ext uri="{BB962C8B-B14F-4D97-AF65-F5344CB8AC3E}">
-        <p14:creationId xmlns:p14="http://schemas.microsoft.com/office/powerpoint/2010/main" val="2824362399"/>
+        <p14:creationId xmlns:p14="http://schemas.microsoft.com/office/powerpoint/2010/main" val="2532371146"/>
       </p:ext>
     </p:extLst>
   </p:cSld>
@@ -11538,7 +11849,7 @@
           <a:p>
             <a:r>
               <a:rPr lang="en-US" dirty="0"/>
-              <a:t>Limitations</a:t>
+              <a:t>Performance</a:t>
             </a:r>
             <a:br>
               <a:rPr lang="en-US" dirty="0"/>
@@ -11574,55 +11885,21 @@
           <a:p>
             <a:r>
               <a:rPr lang="en-US" dirty="0"/>
-              <a:t>Limits found on the server end</a:t>
+              <a:t>Test in 2021 for ITER building automation integration</a:t>
             </a:r>
           </a:p>
           <a:p>
             <a:pPr lvl="1"/>
             <a:r>
               <a:rPr lang="en-US" dirty="0"/>
-              <a:t>S7-1500: depends on the model (S/M/L) and data organization</a:t>
+              <a:t>Trying to verify realistic conditions </a:t>
             </a:r>
           </a:p>
           <a:p>
             <a:pPr lvl="1"/>
             <a:r>
               <a:rPr lang="en-US" dirty="0"/>
-              <a:t>How many, how large, how often?</a:t>
-            </a:r>
-          </a:p>
-          <a:p>
-            <a:pPr lvl="1"/>
-            <a:r>
-              <a:rPr lang="en-US" dirty="0"/>
-              <a:t>Client-side fine tuning available</a:t>
-            </a:r>
-            <a:br>
-              <a:rPr lang="en-US" dirty="0"/>
-            </a:br>
-            <a:r>
-              <a:rPr lang="en-US" i="1" dirty="0"/>
-              <a:t>e.g., “registering” items to cache server-side name resolution</a:t>
-            </a:r>
-          </a:p>
-          <a:p>
-            <a:pPr lvl="1"/>
-            <a:r>
-              <a:rPr lang="en-US" dirty="0"/>
-              <a:t>Servers separate from PLCs introduce additional latency</a:t>
-            </a:r>
-          </a:p>
-          <a:p>
-            <a:r>
-              <a:rPr lang="en-US" dirty="0"/>
-              <a:t>Found one limit in the client</a:t>
-            </a:r>
-          </a:p>
-          <a:p>
-            <a:pPr lvl="1"/>
-            <a:r>
-              <a:rPr lang="en-US" dirty="0"/>
-              <a:t>LabVIEW serving 600 arrays of 7500 doubles each (~</a:t>
+              <a:t>3x the estimated size (</a:t>
             </a:r>
             <a:r>
               <a:rPr lang="en-US" b="1" dirty="0">
@@ -11630,30 +11907,75 @@
                   <a:srgbClr val="FFFF00"/>
                 </a:solidFill>
               </a:rPr>
-              <a:t>36MB data</a:t>
-            </a:r>
-            <a:r>
-              <a:rPr lang="en-US" dirty="0"/>
-              <a:t>)</a:t>
+              <a:t>500kB data</a:t>
+            </a:r>
+            <a:r>
+              <a:rPr lang="en-US" dirty="0"/>
+              <a:t>, mixed types)</a:t>
+            </a:r>
+          </a:p>
+          <a:p>
+            <a:pPr lvl="1"/>
+            <a:r>
+              <a:rPr lang="en-US" dirty="0"/>
+              <a:t>On a mid-size S7-1516</a:t>
+            </a:r>
+          </a:p>
+          <a:p>
+            <a:pPr lvl="1"/>
+            <a:r>
+              <a:rPr lang="en-US" dirty="0"/>
+              <a:t>250ms sampling/publishing period</a:t>
+            </a:r>
+          </a:p>
+          <a:p>
+            <a:pPr lvl="1"/>
+            <a:r>
+              <a:rPr lang="en-US" dirty="0"/>
+              <a:t>No performance fine-tuning</a:t>
+            </a:r>
+          </a:p>
+          <a:p>
+            <a:r>
+              <a:rPr lang="en-US" dirty="0"/>
+              <a:t>Results:</a:t>
+            </a:r>
+          </a:p>
+          <a:p>
+            <a:pPr lvl="1"/>
+            <a:r>
+              <a:rPr lang="en-US" dirty="0"/>
+              <a:t>Fit for this purpose</a:t>
+            </a:r>
+          </a:p>
+          <a:p>
+            <a:pPr lvl="1"/>
+            <a:r>
+              <a:rPr lang="en-US" dirty="0"/>
+              <a:t>Best performance when using few large structures</a:t>
             </a:r>
             <a:br>
               <a:rPr lang="en-US" dirty="0"/>
             </a:br>
             <a:r>
-              <a:rPr lang="en-US" dirty="0"/>
-              <a:t>-&gt; SDK client has a limit of ~16MB for the </a:t>
-            </a:r>
-            <a:r>
-              <a:rPr lang="en-US" dirty="0" err="1"/>
-              <a:t>serializer</a:t>
-            </a:r>
-            <a:br>
-              <a:rPr lang="en-US" dirty="0"/>
-            </a:br>
-            <a:r>
-              <a:rPr lang="en-US" dirty="0"/>
-              <a:t>Solved by splitting to three subscriptions of 200 arrays each</a:t>
-            </a:r>
+              <a:rPr lang="en-US" i="1" dirty="0"/>
+              <a:t>(this is a </a:t>
+            </a:r>
+            <a:r>
+              <a:rPr lang="en-US" i="1"/>
+              <a:t>“feature” </a:t>
+            </a:r>
+            <a:r>
+              <a:rPr lang="en-US" i="1" dirty="0"/>
+              <a:t>of the embedded Siemens server)</a:t>
+            </a:r>
+          </a:p>
+          <a:p>
+            <a:pPr lvl="1"/>
+            <a:endParaRPr lang="en-US" dirty="0"/>
+          </a:p>
+          <a:p>
+            <a:endParaRPr lang="en-US" dirty="0"/>
           </a:p>
         </p:txBody>
       </p:sp>
@@ -11683,7 +12005,7 @@
     </p:spTree>
     <p:extLst>
       <p:ext uri="{BB962C8B-B14F-4D97-AF65-F5344CB8AC3E}">
-        <p14:creationId xmlns:p14="http://schemas.microsoft.com/office/powerpoint/2010/main" val="3860883976"/>
+        <p14:creationId xmlns:p14="http://schemas.microsoft.com/office/powerpoint/2010/main" val="2824362399"/>
       </p:ext>
     </p:extLst>
   </p:cSld>
@@ -11712,13 +12034,7 @@
       </p:grpSpPr>
       <p:sp>
         <p:nvSpPr>
-          <p:cNvPr id="2" name="Title 1">
-            <a:extLst>
-              <a:ext uri="{FF2B5EF4-FFF2-40B4-BE49-F238E27FC236}">
-                <a16:creationId xmlns:a16="http://schemas.microsoft.com/office/drawing/2014/main" id="{E2958208-44E3-E381-93EE-CE8C8EB630BA}"/>
-              </a:ext>
-            </a:extLst>
-          </p:cNvPr>
+          <p:cNvPr id="2" name="Title 1"/>
           <p:cNvSpPr>
             <a:spLocks noGrp="1"/>
           </p:cNvSpPr>
@@ -11733,50 +12049,128 @@
           <a:p>
             <a:r>
               <a:rPr lang="en-US" dirty="0"/>
-              <a:t>Out-of-Scope</a:t>
-            </a:r>
-            <a:endParaRPr lang="en-GB" dirty="0"/>
-          </a:p>
-        </p:txBody>
-      </p:sp>
-      <p:sp>
-        <p:nvSpPr>
-          <p:cNvPr id="3" name="Text Placeholder 2">
-            <a:extLst>
-              <a:ext uri="{FF2B5EF4-FFF2-40B4-BE49-F238E27FC236}">
-                <a16:creationId xmlns:a16="http://schemas.microsoft.com/office/drawing/2014/main" id="{71385EBE-1623-1392-31C4-ACA169AE0933}"/>
-              </a:ext>
-            </a:extLst>
-          </p:cNvPr>
-          <p:cNvSpPr>
-            <a:spLocks noGrp="1"/>
-          </p:cNvSpPr>
-          <p:nvPr>
-            <p:ph type="body" idx="1"/>
-          </p:nvPr>
-        </p:nvSpPr>
-        <p:spPr/>
-        <p:txBody>
-          <a:bodyPr/>
+              <a:t>Limitations</a:t>
+            </a:r>
+            <a:br>
+              <a:rPr lang="en-US" dirty="0"/>
+            </a:br>
+            <a:r>
+              <a:rPr lang="en-US" sz="2800" i="1" dirty="0"/>
+              <a:t>It All Depends – Mostly on the Server</a:t>
+            </a:r>
+          </a:p>
+        </p:txBody>
+      </p:sp>
+      <p:sp>
+        <p:nvSpPr>
+          <p:cNvPr id="3" name="Content Placeholder 2"/>
+          <p:cNvSpPr>
+            <a:spLocks noGrp="1"/>
+          </p:cNvSpPr>
+          <p:nvPr>
+            <p:ph idx="1"/>
+          </p:nvPr>
+        </p:nvSpPr>
+        <p:spPr>
+          <a:xfrm>
+            <a:off x="1103312" y="1872000"/>
+            <a:ext cx="9342363" cy="4374000"/>
+          </a:xfrm>
+        </p:spPr>
+        <p:txBody>
+          <a:bodyPr>
+            <a:noAutofit/>
+          </a:bodyPr>
           <a:lstStyle/>
           <a:p>
             <a:r>
               <a:rPr lang="en-US" dirty="0"/>
-              <a:t>Interesting Ideas</a:t>
-            </a:r>
-            <a:endParaRPr lang="en-GB" dirty="0"/>
-          </a:p>
-        </p:txBody>
-      </p:sp>
-      <p:sp>
-        <p:nvSpPr>
-          <p:cNvPr id="4" name="Slide Number Placeholder 3">
-            <a:extLst>
-              <a:ext uri="{FF2B5EF4-FFF2-40B4-BE49-F238E27FC236}">
-                <a16:creationId xmlns:a16="http://schemas.microsoft.com/office/drawing/2014/main" id="{D4EEFC98-889C-A9DE-7FF2-1B3FFFF8E875}"/>
-              </a:ext>
-            </a:extLst>
-          </p:cNvPr>
+              <a:t>Limits found on the server end</a:t>
+            </a:r>
+          </a:p>
+          <a:p>
+            <a:pPr lvl="1"/>
+            <a:r>
+              <a:rPr lang="en-US" dirty="0"/>
+              <a:t>S7-1500: depends on the model (S/M/L) and data organization</a:t>
+            </a:r>
+          </a:p>
+          <a:p>
+            <a:pPr lvl="1"/>
+            <a:r>
+              <a:rPr lang="en-US" dirty="0"/>
+              <a:t>How many, how large, how often?</a:t>
+            </a:r>
+          </a:p>
+          <a:p>
+            <a:pPr lvl="1"/>
+            <a:r>
+              <a:rPr lang="en-US" dirty="0"/>
+              <a:t>Client-side fine tuning available</a:t>
+            </a:r>
+            <a:br>
+              <a:rPr lang="en-US" dirty="0"/>
+            </a:br>
+            <a:r>
+              <a:rPr lang="en-US" i="1" dirty="0"/>
+              <a:t>e.g., “registering” items to cache server-side name resolution</a:t>
+            </a:r>
+          </a:p>
+          <a:p>
+            <a:pPr lvl="1"/>
+            <a:r>
+              <a:rPr lang="en-US" dirty="0"/>
+              <a:t>Servers separate from PLCs introduce additional latency</a:t>
+            </a:r>
+          </a:p>
+          <a:p>
+            <a:r>
+              <a:rPr lang="en-US" dirty="0"/>
+              <a:t>Found one limit in the client</a:t>
+            </a:r>
+          </a:p>
+          <a:p>
+            <a:pPr lvl="1"/>
+            <a:r>
+              <a:rPr lang="en-US" dirty="0"/>
+              <a:t>LabVIEW serving 600 arrays of 7500 doubles each (~</a:t>
+            </a:r>
+            <a:r>
+              <a:rPr lang="en-US" b="1" dirty="0">
+                <a:solidFill>
+                  <a:srgbClr val="FFFF00"/>
+                </a:solidFill>
+              </a:rPr>
+              <a:t>36MB data</a:t>
+            </a:r>
+            <a:r>
+              <a:rPr lang="en-US" dirty="0"/>
+              <a:t>)</a:t>
+            </a:r>
+            <a:br>
+              <a:rPr lang="en-US" dirty="0"/>
+            </a:br>
+            <a:r>
+              <a:rPr lang="en-US" dirty="0"/>
+              <a:t>-&gt; SDK client has a limit of ~16MB for the </a:t>
+            </a:r>
+            <a:r>
+              <a:rPr lang="en-US" dirty="0" err="1"/>
+              <a:t>serializer</a:t>
+            </a:r>
+            <a:br>
+              <a:rPr lang="en-US" dirty="0"/>
+            </a:br>
+            <a:r>
+              <a:rPr lang="en-US" dirty="0"/>
+              <a:t>Solved by splitting to three subscriptions of 200 arrays each</a:t>
+            </a:r>
+          </a:p>
+        </p:txBody>
+      </p:sp>
+      <p:sp>
+        <p:nvSpPr>
+          <p:cNvPr id="4" name="Slide Number Placeholder 3"/>
           <p:cNvSpPr>
             <a:spLocks noGrp="1"/>
           </p:cNvSpPr>
@@ -11800,7 +12194,7 @@
     </p:spTree>
     <p:extLst>
       <p:ext uri="{BB962C8B-B14F-4D97-AF65-F5344CB8AC3E}">
-        <p14:creationId xmlns:p14="http://schemas.microsoft.com/office/powerpoint/2010/main" val="389537169"/>
+        <p14:creationId xmlns:p14="http://schemas.microsoft.com/office/powerpoint/2010/main" val="3860883976"/>
       </p:ext>
     </p:extLst>
   </p:cSld>
@@ -11829,7 +12223,13 @@
       </p:grpSpPr>
       <p:sp>
         <p:nvSpPr>
-          <p:cNvPr id="2" name="Title 1"/>
+          <p:cNvPr id="2" name="Title 1">
+            <a:extLst>
+              <a:ext uri="{FF2B5EF4-FFF2-40B4-BE49-F238E27FC236}">
+                <a16:creationId xmlns:a16="http://schemas.microsoft.com/office/drawing/2014/main" id="{E2958208-44E3-E381-93EE-CE8C8EB630BA}"/>
+              </a:ext>
+            </a:extLst>
+          </p:cNvPr>
           <p:cNvSpPr>
             <a:spLocks noGrp="1"/>
           </p:cNvSpPr>
@@ -11843,28 +12243,27 @@
           <a:lstStyle/>
           <a:p>
             <a:r>
-              <a:rPr lang="en-US"/>
-              <a:t>An IOC as an OPC UA Server?</a:t>
-            </a:r>
-            <a:br>
-              <a:rPr lang="en-US"/>
-            </a:br>
-            <a:r>
-              <a:rPr lang="en-US" sz="2800" i="1"/>
-              <a:t>Complicated and Hard to Do</a:t>
-            </a:r>
-            <a:endParaRPr lang="en-US" sz="2800" i="1" dirty="0"/>
-          </a:p>
-        </p:txBody>
-      </p:sp>
-      <p:sp>
-        <p:nvSpPr>
-          <p:cNvPr id="3" name="Content Placeholder 2"/>
-          <p:cNvSpPr>
-            <a:spLocks noGrp="1"/>
-          </p:cNvSpPr>
-          <p:nvPr>
-            <p:ph idx="1"/>
+              <a:rPr lang="en-US" dirty="0"/>
+              <a:t>Out-of-Scope</a:t>
+            </a:r>
+            <a:endParaRPr lang="en-GB" dirty="0"/>
+          </a:p>
+        </p:txBody>
+      </p:sp>
+      <p:sp>
+        <p:nvSpPr>
+          <p:cNvPr id="3" name="Text Placeholder 2">
+            <a:extLst>
+              <a:ext uri="{FF2B5EF4-FFF2-40B4-BE49-F238E27FC236}">
+                <a16:creationId xmlns:a16="http://schemas.microsoft.com/office/drawing/2014/main" id="{71385EBE-1623-1392-31C4-ACA169AE0933}"/>
+              </a:ext>
+            </a:extLst>
+          </p:cNvPr>
+          <p:cNvSpPr>
+            <a:spLocks noGrp="1"/>
+          </p:cNvSpPr>
+          <p:nvPr>
+            <p:ph type="body" idx="1"/>
           </p:nvPr>
         </p:nvSpPr>
         <p:spPr/>
@@ -11874,68 +12273,21 @@
           <a:p>
             <a:r>
               <a:rPr lang="en-US" dirty="0"/>
-              <a:t>This way of operation has not been requested by anyone</a:t>
-            </a:r>
-          </a:p>
-          <a:p>
-            <a:pPr lvl="1"/>
-            <a:r>
-              <a:rPr lang="en-US" dirty="0"/>
-              <a:t>EPICS is usually the top SCADA system used for integration</a:t>
-            </a:r>
-          </a:p>
-          <a:p>
-            <a:pPr lvl="1"/>
-            <a:r>
-              <a:rPr lang="en-US" dirty="0"/>
-              <a:t>Two exceptions: teams that wanted to use an EPICS IOC as a controller in the context of an industrial control system</a:t>
-            </a:r>
-          </a:p>
-          <a:p>
-            <a:r>
-              <a:rPr lang="en-US" dirty="0"/>
-              <a:t>The open62541 server could be run on the IOC</a:t>
-            </a:r>
-          </a:p>
-          <a:p>
-            <a:pPr lvl="1"/>
-            <a:r>
-              <a:rPr lang="en-US" dirty="0"/>
-              <a:t>In EPICS 7, there is a server API that both CA and PVA servers use</a:t>
-            </a:r>
-          </a:p>
-          <a:p>
-            <a:pPr lvl="1"/>
-            <a:r>
-              <a:rPr lang="en-US" dirty="0"/>
-              <a:t>QSRV could work as a model for the Database integration</a:t>
-            </a:r>
-          </a:p>
-          <a:p>
-            <a:r>
-              <a:rPr lang="en-US" dirty="0"/>
-              <a:t>The big task: getting the information model right</a:t>
-            </a:r>
-          </a:p>
-          <a:p>
-            <a:pPr lvl="1"/>
-            <a:r>
-              <a:rPr lang="en-US" dirty="0"/>
-              <a:t>Needs considerable experience with OPC UA server design</a:t>
-            </a:r>
-          </a:p>
-          <a:p>
-            <a:pPr lvl="1"/>
-            <a:r>
-              <a:rPr lang="en-US" dirty="0"/>
-              <a:t>The Companion Information Model needs to be done right to assure interoperability</a:t>
-            </a:r>
-          </a:p>
-        </p:txBody>
-      </p:sp>
-      <p:sp>
-        <p:nvSpPr>
-          <p:cNvPr id="4" name="Slide Number Placeholder 3"/>
+              <a:t>Interesting Ideas</a:t>
+            </a:r>
+            <a:endParaRPr lang="en-GB" dirty="0"/>
+          </a:p>
+        </p:txBody>
+      </p:sp>
+      <p:sp>
+        <p:nvSpPr>
+          <p:cNvPr id="4" name="Slide Number Placeholder 3">
+            <a:extLst>
+              <a:ext uri="{FF2B5EF4-FFF2-40B4-BE49-F238E27FC236}">
+                <a16:creationId xmlns:a16="http://schemas.microsoft.com/office/drawing/2014/main" id="{D4EEFC98-889C-A9DE-7FF2-1B3FFFF8E875}"/>
+              </a:ext>
+            </a:extLst>
+          </p:cNvPr>
           <p:cNvSpPr>
             <a:spLocks noGrp="1"/>
           </p:cNvSpPr>
@@ -11959,7 +12311,7 @@
     </p:spTree>
     <p:extLst>
       <p:ext uri="{BB962C8B-B14F-4D97-AF65-F5344CB8AC3E}">
-        <p14:creationId xmlns:p14="http://schemas.microsoft.com/office/powerpoint/2010/main" val="3213006539"/>
+        <p14:creationId xmlns:p14="http://schemas.microsoft.com/office/powerpoint/2010/main" val="389537169"/>
       </p:ext>
     </p:extLst>
   </p:cSld>
@@ -12003,6 +12355,165 @@
           <a:p>
             <a:r>
               <a:rPr lang="en-US"/>
+              <a:t>An IOC as an OPC UA Server?</a:t>
+            </a:r>
+            <a:br>
+              <a:rPr lang="en-US"/>
+            </a:br>
+            <a:r>
+              <a:rPr lang="en-US" sz="2800" i="1"/>
+              <a:t>Complicated and Hard to Do</a:t>
+            </a:r>
+            <a:endParaRPr lang="en-US" sz="2800" i="1" dirty="0"/>
+          </a:p>
+        </p:txBody>
+      </p:sp>
+      <p:sp>
+        <p:nvSpPr>
+          <p:cNvPr id="3" name="Content Placeholder 2"/>
+          <p:cNvSpPr>
+            <a:spLocks noGrp="1"/>
+          </p:cNvSpPr>
+          <p:nvPr>
+            <p:ph idx="1"/>
+          </p:nvPr>
+        </p:nvSpPr>
+        <p:spPr/>
+        <p:txBody>
+          <a:bodyPr/>
+          <a:lstStyle/>
+          <a:p>
+            <a:r>
+              <a:rPr lang="en-US" dirty="0"/>
+              <a:t>This way of operation has not been requested by anyone</a:t>
+            </a:r>
+          </a:p>
+          <a:p>
+            <a:pPr lvl="1"/>
+            <a:r>
+              <a:rPr lang="en-US" dirty="0"/>
+              <a:t>EPICS is usually the top SCADA system used for integration</a:t>
+            </a:r>
+          </a:p>
+          <a:p>
+            <a:pPr lvl="1"/>
+            <a:r>
+              <a:rPr lang="en-US" dirty="0"/>
+              <a:t>Two exceptions: teams that wanted to use an EPICS IOC as a controller in the context of an industrial control system</a:t>
+            </a:r>
+          </a:p>
+          <a:p>
+            <a:r>
+              <a:rPr lang="en-US" dirty="0"/>
+              <a:t>The open62541 server could be run on the IOC</a:t>
+            </a:r>
+          </a:p>
+          <a:p>
+            <a:pPr lvl="1"/>
+            <a:r>
+              <a:rPr lang="en-US" dirty="0"/>
+              <a:t>In EPICS 7, there is a server API that both CA and PVA servers use</a:t>
+            </a:r>
+          </a:p>
+          <a:p>
+            <a:pPr lvl="1"/>
+            <a:r>
+              <a:rPr lang="en-US" dirty="0"/>
+              <a:t>QSRV could work as a model for the Database integration</a:t>
+            </a:r>
+          </a:p>
+          <a:p>
+            <a:r>
+              <a:rPr lang="en-US" dirty="0"/>
+              <a:t>The big task: getting the information model right</a:t>
+            </a:r>
+          </a:p>
+          <a:p>
+            <a:pPr lvl="1"/>
+            <a:r>
+              <a:rPr lang="en-US" dirty="0"/>
+              <a:t>Needs considerable experience with OPC UA server design</a:t>
+            </a:r>
+          </a:p>
+          <a:p>
+            <a:pPr lvl="1"/>
+            <a:r>
+              <a:rPr lang="en-US" dirty="0"/>
+              <a:t>The Companion Information Model needs to be done right to assure interoperability</a:t>
+            </a:r>
+          </a:p>
+        </p:txBody>
+      </p:sp>
+      <p:sp>
+        <p:nvSpPr>
+          <p:cNvPr id="4" name="Slide Number Placeholder 3"/>
+          <p:cNvSpPr>
+            <a:spLocks noGrp="1"/>
+          </p:cNvSpPr>
+          <p:nvPr>
+            <p:ph type="sldNum" sz="quarter" idx="12"/>
+          </p:nvPr>
+        </p:nvSpPr>
+        <p:spPr/>
+        <p:txBody>
+          <a:bodyPr/>
+          <a:lstStyle/>
+          <a:p>
+            <a:fld id="{D57F1E4F-1CFF-5643-939E-02111984F565}" type="slidenum">
+              <a:rPr lang="en-US" smtClean="0"/>
+              <a:t>24</a:t>
+            </a:fld>
+            <a:endParaRPr lang="en-US" dirty="0"/>
+          </a:p>
+        </p:txBody>
+      </p:sp>
+    </p:spTree>
+    <p:extLst>
+      <p:ext uri="{BB962C8B-B14F-4D97-AF65-F5344CB8AC3E}">
+        <p14:creationId xmlns:p14="http://schemas.microsoft.com/office/powerpoint/2010/main" val="3213006539"/>
+      </p:ext>
+    </p:extLst>
+  </p:cSld>
+  <p:clrMapOvr>
+    <a:masterClrMapping/>
+  </p:clrMapOvr>
+</p:sld>
+</file>
+
+<file path=ppt/slides/slide25.xml><?xml version="1.0" encoding="utf-8"?>
+<p:sld xmlns:a="http://schemas.openxmlformats.org/drawingml/2006/main" xmlns:r="http://schemas.openxmlformats.org/officeDocument/2006/relationships" xmlns:p="http://schemas.openxmlformats.org/presentationml/2006/main">
+  <p:cSld>
+    <p:spTree>
+      <p:nvGrpSpPr>
+        <p:cNvPr id="1" name=""/>
+        <p:cNvGrpSpPr/>
+        <p:nvPr/>
+      </p:nvGrpSpPr>
+      <p:grpSpPr>
+        <a:xfrm>
+          <a:off x="0" y="0"/>
+          <a:ext cx="0" cy="0"/>
+          <a:chOff x="0" y="0"/>
+          <a:chExt cx="0" cy="0"/>
+        </a:xfrm>
+      </p:grpSpPr>
+      <p:sp>
+        <p:nvSpPr>
+          <p:cNvPr id="2" name="Title 1"/>
+          <p:cNvSpPr>
+            <a:spLocks noGrp="1"/>
+          </p:cNvSpPr>
+          <p:nvPr>
+            <p:ph type="title"/>
+          </p:nvPr>
+        </p:nvSpPr>
+        <p:spPr/>
+        <p:txBody>
+          <a:bodyPr/>
+          <a:lstStyle/>
+          <a:p>
+            <a:r>
+              <a:rPr lang="en-US"/>
               <a:t>A Generic OPC UA – EPICS Bridge?</a:t>
             </a:r>
             <a:br>
@@ -12121,7 +12632,7 @@
           <a:p>
             <a:fld id="{D57F1E4F-1CFF-5643-939E-02111984F565}" type="slidenum">
               <a:rPr lang="en-US" smtClean="0"/>
-              <a:t>24</a:t>
+              <a:t>25</a:t>
             </a:fld>
             <a:endParaRPr lang="en-US" dirty="0"/>
           </a:p>
@@ -14527,51 +15038,6 @@
       </p:sp>
       <p:sp>
         <p:nvSpPr>
-          <p:cNvPr id="11" name="Rectangle 10"/>
-          <p:cNvSpPr/>
-          <p:nvPr/>
-        </p:nvSpPr>
-        <p:spPr>
-          <a:xfrm>
-            <a:off x="4733183" y="4934335"/>
-            <a:ext cx="780111" cy="347670"/>
-          </a:xfrm>
-          <a:prstGeom prst="rect">
-            <a:avLst/>
-          </a:prstGeom>
-          <a:solidFill>
-            <a:schemeClr val="accent1">
-              <a:alpha val="70000"/>
-            </a:schemeClr>
-          </a:solidFill>
-        </p:spPr>
-        <p:style>
-          <a:lnRef idx="2">
-            <a:schemeClr val="accent1">
-              <a:shade val="50000"/>
-            </a:schemeClr>
-          </a:lnRef>
-          <a:fillRef idx="1">
-            <a:schemeClr val="accent1"/>
-          </a:fillRef>
-          <a:effectRef idx="0">
-            <a:schemeClr val="accent1"/>
-          </a:effectRef>
-          <a:fontRef idx="minor">
-            <a:schemeClr val="lt1"/>
-          </a:fontRef>
-        </p:style>
-        <p:txBody>
-          <a:bodyPr rtlCol="0" anchor="ctr"/>
-          <a:lstStyle/>
-          <a:p>
-            <a:pPr algn="ctr"/>
-            <a:endParaRPr lang="en-US"/>
-          </a:p>
-        </p:txBody>
-      </p:sp>
-      <p:sp>
-        <p:nvSpPr>
           <p:cNvPr id="12" name="Rectangle 11"/>
           <p:cNvSpPr/>
           <p:nvPr/>
@@ -14586,7 +15052,7 @@
           </a:prstGeom>
           <a:solidFill>
             <a:schemeClr val="accent1">
-              <a:alpha val="70000"/>
+              <a:alpha val="30000"/>
             </a:schemeClr>
           </a:solidFill>
         </p:spPr>
@@ -14799,7 +15265,7 @@
                                           </p:stCondLst>
                                         </p:cTn>
                                         <p:tgtEl>
-                                          <p:spTgt spid="11"/>
+                                          <p:spTgt spid="10"/>
                                         </p:tgtEl>
                                         <p:attrNameLst>
                                           <p:attrName>style.visibility</p:attrName>
@@ -14826,7 +15292,7 @@
                                           </p:stCondLst>
                                         </p:cTn>
                                         <p:tgtEl>
-                                          <p:spTgt spid="10"/>
+                                          <p:spTgt spid="8"/>
                                         </p:tgtEl>
                                         <p:attrNameLst>
                                           <p:attrName>style.visibility</p:attrName>
@@ -14853,7 +15319,7 @@
                                           </p:stCondLst>
                                         </p:cTn>
                                         <p:tgtEl>
-                                          <p:spTgt spid="8"/>
+                                          <p:spTgt spid="14"/>
                                         </p:tgtEl>
                                         <p:attrNameLst>
                                           <p:attrName>style.visibility</p:attrName>
@@ -14880,7 +15346,7 @@
                                           </p:stCondLst>
                                         </p:cTn>
                                         <p:tgtEl>
-                                          <p:spTgt spid="14"/>
+                                          <p:spTgt spid="13"/>
                                         </p:tgtEl>
                                         <p:attrNameLst>
                                           <p:attrName>style.visibility</p:attrName>
@@ -14907,7 +15373,7 @@
                                           </p:stCondLst>
                                         </p:cTn>
                                         <p:tgtEl>
-                                          <p:spTgt spid="13"/>
+                                          <p:spTgt spid="12"/>
                                         </p:tgtEl>
                                         <p:attrNameLst>
                                           <p:attrName>style.visibility</p:attrName>
@@ -14929,33 +15395,6 @@
                                     <p:set>
                                       <p:cBhvr>
                                         <p:cTn id="18" dur="1" fill="hold">
-                                          <p:stCondLst>
-                                            <p:cond delay="0"/>
-                                          </p:stCondLst>
-                                        </p:cTn>
-                                        <p:tgtEl>
-                                          <p:spTgt spid="12"/>
-                                        </p:tgtEl>
-                                        <p:attrNameLst>
-                                          <p:attrName>style.visibility</p:attrName>
-                                        </p:attrNameLst>
-                                      </p:cBhvr>
-                                      <p:to>
-                                        <p:strVal val="visible"/>
-                                      </p:to>
-                                    </p:set>
-                                  </p:childTnLst>
-                                </p:cTn>
-                              </p:par>
-                              <p:par>
-                                <p:cTn id="19" presetID="1" presetClass="entr" presetSubtype="0" fill="hold" grpId="0" nodeType="withEffect">
-                                  <p:stCondLst>
-                                    <p:cond delay="0"/>
-                                  </p:stCondLst>
-                                  <p:childTnLst>
-                                    <p:set>
-                                      <p:cBhvr>
-                                        <p:cTn id="20" dur="1" fill="hold">
                                           <p:stCondLst>
                                             <p:cond delay="0"/>
                                           </p:stCondLst>
@@ -15006,7 +15445,6 @@
       <p:bldP spid="8" grpId="0" animBg="1"/>
       <p:bldP spid="7" grpId="0"/>
       <p:bldP spid="10" grpId="0" animBg="1"/>
-      <p:bldP spid="11" grpId="0" animBg="1"/>
       <p:bldP spid="12" grpId="0" animBg="1"/>
       <p:bldP spid="13" grpId="0" animBg="1"/>
       <p:bldP spid="14" grpId="0" animBg="1"/>
